--- a/docs/how-to-usrp.pptx
+++ b/docs/how-to-usrp.pptx
@@ -5,7 +5,7 @@
     <p:sldMasterId id="2147483648" r:id="rId1"/>
   </p:sldMasterIdLst>
   <p:notesMasterIdLst>
-    <p:notesMasterId r:id="rId81"/>
+    <p:notesMasterId r:id="rId84"/>
   </p:notesMasterIdLst>
   <p:sldIdLst>
     <p:sldId id="256" r:id="rId2"/>
@@ -65,28 +65,31 @@
     <p:sldId id="862" r:id="rId56"/>
     <p:sldId id="863" r:id="rId57"/>
     <p:sldId id="322" r:id="rId58"/>
-    <p:sldId id="851" r:id="rId59"/>
-    <p:sldId id="852" r:id="rId60"/>
-    <p:sldId id="887" r:id="rId61"/>
-    <p:sldId id="919" r:id="rId62"/>
-    <p:sldId id="921" r:id="rId63"/>
-    <p:sldId id="1005" r:id="rId64"/>
-    <p:sldId id="1008" r:id="rId65"/>
-    <p:sldId id="1013" r:id="rId66"/>
-    <p:sldId id="978" r:id="rId67"/>
-    <p:sldId id="996" r:id="rId68"/>
-    <p:sldId id="1002" r:id="rId69"/>
-    <p:sldId id="1006" r:id="rId70"/>
-    <p:sldId id="979" r:id="rId71"/>
-    <p:sldId id="980" r:id="rId72"/>
-    <p:sldId id="872" r:id="rId73"/>
-    <p:sldId id="999" r:id="rId74"/>
-    <p:sldId id="866" r:id="rId75"/>
-    <p:sldId id="869" r:id="rId76"/>
-    <p:sldId id="345" r:id="rId77"/>
-    <p:sldId id="344" r:id="rId78"/>
-    <p:sldId id="853" r:id="rId79"/>
-    <p:sldId id="998" r:id="rId80"/>
+    <p:sldId id="1014" r:id="rId59"/>
+    <p:sldId id="1015" r:id="rId60"/>
+    <p:sldId id="1016" r:id="rId61"/>
+    <p:sldId id="851" r:id="rId62"/>
+    <p:sldId id="852" r:id="rId63"/>
+    <p:sldId id="887" r:id="rId64"/>
+    <p:sldId id="919" r:id="rId65"/>
+    <p:sldId id="921" r:id="rId66"/>
+    <p:sldId id="1005" r:id="rId67"/>
+    <p:sldId id="1008" r:id="rId68"/>
+    <p:sldId id="1013" r:id="rId69"/>
+    <p:sldId id="978" r:id="rId70"/>
+    <p:sldId id="996" r:id="rId71"/>
+    <p:sldId id="1002" r:id="rId72"/>
+    <p:sldId id="1006" r:id="rId73"/>
+    <p:sldId id="979" r:id="rId74"/>
+    <p:sldId id="980" r:id="rId75"/>
+    <p:sldId id="872" r:id="rId76"/>
+    <p:sldId id="999" r:id="rId77"/>
+    <p:sldId id="866" r:id="rId78"/>
+    <p:sldId id="869" r:id="rId79"/>
+    <p:sldId id="345" r:id="rId80"/>
+    <p:sldId id="344" r:id="rId81"/>
+    <p:sldId id="853" r:id="rId82"/>
+    <p:sldId id="998" r:id="rId83"/>
   </p:sldIdLst>
   <p:sldSz cx="12192000" cy="6858000"/>
   <p:notesSz cx="6858000" cy="9144000"/>
@@ -273,6 +276,13 @@
             <p14:sldId id="322"/>
           </p14:sldIdLst>
         </p14:section>
+        <p14:section name="GNU Radio" id="{8026791F-2ACC-4890-9CF9-6073521FC6C8}">
+          <p14:sldIdLst>
+            <p14:sldId id="1014"/>
+            <p14:sldId id="1015"/>
+            <p14:sldId id="1016"/>
+          </p14:sldIdLst>
+        </p14:section>
         <p14:section name="Experimental Info" id="{27A6F7FD-A574-4BDC-8306-DE9DA329EA6C}">
           <p14:sldIdLst>
             <p14:sldId id="851"/>
@@ -481,7 +491,7 @@
           <a:p>
             <a:fld id="{7A71371E-0AB0-4E1B-9F79-83C8F32365BE}" type="datetimeFigureOut">
               <a:rPr lang="en-US" smtClean="0"/>
-              <a:t>4/2/2025</a:t>
+              <a:t>7/1/2025</a:t>
             </a:fld>
             <a:endParaRPr lang="en-US"/>
           </a:p>
@@ -2123,7 +2133,7 @@
           <a:p>
             <a:fld id="{CAA19DDD-B1BD-4DBB-A1A9-366082CC542B}" type="slidenum">
               <a:rPr lang="en-US" smtClean="0"/>
-              <a:t>60</a:t>
+              <a:t>63</a:t>
             </a:fld>
             <a:endParaRPr lang="en-US"/>
           </a:p>
@@ -2210,7 +2220,7 @@
           <a:p>
             <a:fld id="{CAA19DDD-B1BD-4DBB-A1A9-366082CC542B}" type="slidenum">
               <a:rPr lang="en-US" smtClean="0"/>
-              <a:t>63</a:t>
+              <a:t>66</a:t>
             </a:fld>
             <a:endParaRPr lang="en-US"/>
           </a:p>
@@ -2307,7 +2317,7 @@
           <a:p>
             <a:fld id="{CAA19DDD-B1BD-4DBB-A1A9-366082CC542B}" type="slidenum">
               <a:rPr lang="en-US" smtClean="0"/>
-              <a:t>67</a:t>
+              <a:t>70</a:t>
             </a:fld>
             <a:endParaRPr lang="en-US"/>
           </a:p>
@@ -2400,7 +2410,7 @@
           <a:p>
             <a:fld id="{CAA19DDD-B1BD-4DBB-A1A9-366082CC542B}" type="slidenum">
               <a:rPr lang="en-US" smtClean="0"/>
-              <a:t>78</a:t>
+              <a:t>81</a:t>
             </a:fld>
             <a:endParaRPr lang="en-US"/>
           </a:p>
@@ -3234,7 +3244,7 @@
           <a:p>
             <a:fld id="{8C8B827B-D727-48E9-881C-E759228D42E3}" type="datetimeFigureOut">
               <a:rPr lang="en-US" smtClean="0"/>
-              <a:t>4/2/2025</a:t>
+              <a:t>7/1/2025</a:t>
             </a:fld>
             <a:endParaRPr lang="en-US"/>
           </a:p>
@@ -3432,7 +3442,7 @@
           <a:p>
             <a:fld id="{8C8B827B-D727-48E9-881C-E759228D42E3}" type="datetimeFigureOut">
               <a:rPr lang="en-US" smtClean="0"/>
-              <a:t>4/2/2025</a:t>
+              <a:t>7/1/2025</a:t>
             </a:fld>
             <a:endParaRPr lang="en-US"/>
           </a:p>
@@ -3640,7 +3650,7 @@
           <a:p>
             <a:fld id="{8C8B827B-D727-48E9-881C-E759228D42E3}" type="datetimeFigureOut">
               <a:rPr lang="en-US" smtClean="0"/>
-              <a:t>4/2/2025</a:t>
+              <a:t>7/1/2025</a:t>
             </a:fld>
             <a:endParaRPr lang="en-US"/>
           </a:p>
@@ -4123,7 +4133,7 @@
           <a:p>
             <a:fld id="{8C8B827B-D727-48E9-881C-E759228D42E3}" type="datetimeFigureOut">
               <a:rPr lang="en-US" smtClean="0"/>
-              <a:t>4/2/2025</a:t>
+              <a:t>7/1/2025</a:t>
             </a:fld>
             <a:endParaRPr lang="en-US"/>
           </a:p>
@@ -4398,7 +4408,7 @@
           <a:p>
             <a:fld id="{8C8B827B-D727-48E9-881C-E759228D42E3}" type="datetimeFigureOut">
               <a:rPr lang="en-US" smtClean="0"/>
-              <a:t>4/2/2025</a:t>
+              <a:t>7/1/2025</a:t>
             </a:fld>
             <a:endParaRPr lang="en-US"/>
           </a:p>
@@ -4663,7 +4673,7 @@
           <a:p>
             <a:fld id="{8C8B827B-D727-48E9-881C-E759228D42E3}" type="datetimeFigureOut">
               <a:rPr lang="en-US" smtClean="0"/>
-              <a:t>4/2/2025</a:t>
+              <a:t>7/1/2025</a:t>
             </a:fld>
             <a:endParaRPr lang="en-US"/>
           </a:p>
@@ -5075,7 +5085,7 @@
           <a:p>
             <a:fld id="{8C8B827B-D727-48E9-881C-E759228D42E3}" type="datetimeFigureOut">
               <a:rPr lang="en-US" smtClean="0"/>
-              <a:t>4/2/2025</a:t>
+              <a:t>7/1/2025</a:t>
             </a:fld>
             <a:endParaRPr lang="en-US"/>
           </a:p>
@@ -5216,7 +5226,7 @@
           <a:p>
             <a:fld id="{8C8B827B-D727-48E9-881C-E759228D42E3}" type="datetimeFigureOut">
               <a:rPr lang="en-US" smtClean="0"/>
-              <a:t>4/2/2025</a:t>
+              <a:t>7/1/2025</a:t>
             </a:fld>
             <a:endParaRPr lang="en-US"/>
           </a:p>
@@ -5329,7 +5339,7 @@
           <a:p>
             <a:fld id="{8C8B827B-D727-48E9-881C-E759228D42E3}" type="datetimeFigureOut">
               <a:rPr lang="en-US" smtClean="0"/>
-              <a:t>4/2/2025</a:t>
+              <a:t>7/1/2025</a:t>
             </a:fld>
             <a:endParaRPr lang="en-US"/>
           </a:p>
@@ -5640,7 +5650,7 @@
           <a:p>
             <a:fld id="{8C8B827B-D727-48E9-881C-E759228D42E3}" type="datetimeFigureOut">
               <a:rPr lang="en-US" smtClean="0"/>
-              <a:t>4/2/2025</a:t>
+              <a:t>7/1/2025</a:t>
             </a:fld>
             <a:endParaRPr lang="en-US"/>
           </a:p>
@@ -5928,7 +5938,7 @@
           <a:p>
             <a:fld id="{8C8B827B-D727-48E9-881C-E759228D42E3}" type="datetimeFigureOut">
               <a:rPr lang="en-US" smtClean="0"/>
-              <a:t>4/2/2025</a:t>
+              <a:t>7/1/2025</a:t>
             </a:fld>
             <a:endParaRPr lang="en-US"/>
           </a:p>
@@ -6169,7 +6179,7 @@
           <a:p>
             <a:fld id="{8C8B827B-D727-48E9-881C-E759228D42E3}" type="datetimeFigureOut">
               <a:rPr lang="en-US" smtClean="0"/>
-              <a:t>4/2/2025</a:t>
+              <a:t>7/1/2025</a:t>
             </a:fld>
             <a:endParaRPr lang="en-US"/>
           </a:p>
@@ -15592,7 +15602,7 @@
           <p:cNvPr id="2" name="Title 1">
             <a:extLst>
               <a:ext uri="{FF2B5EF4-FFF2-40B4-BE49-F238E27FC236}">
-                <a16:creationId xmlns:a16="http://schemas.microsoft.com/office/drawing/2014/main" id="{474FBC8C-7155-6884-00C1-4E81E87EEE32}"/>
+                <a16:creationId xmlns:a16="http://schemas.microsoft.com/office/drawing/2014/main" id="{F5BC5FE1-8DE8-4F07-8BDC-A0788C53E417}"/>
               </a:ext>
             </a:extLst>
           </p:cNvPr>
@@ -15605,380 +15615,60 @@
         </p:nvSpPr>
         <p:spPr/>
         <p:txBody>
-          <a:bodyPr>
-            <a:normAutofit fontScale="90000"/>
-          </a:bodyPr>
-          <a:lstStyle/>
-          <a:p>
-            <a:pPr algn="ctr"/>
-            <a:r>
-              <a:rPr lang="en-US" dirty="0"/>
-              <a:t>USRP Processing Delay</a:t>
-            </a:r>
-          </a:p>
-        </p:txBody>
-      </p:sp>
-      <p:sp>
-        <p:nvSpPr>
-          <p:cNvPr id="3" name="Text Placeholder 2">
-            <a:extLst>
-              <a:ext uri="{FF2B5EF4-FFF2-40B4-BE49-F238E27FC236}">
-                <a16:creationId xmlns:a16="http://schemas.microsoft.com/office/drawing/2014/main" id="{E9412DD0-E338-3F7D-7351-6ECC28968CCA}"/>
-              </a:ext>
-            </a:extLst>
-          </p:cNvPr>
-          <p:cNvSpPr>
-            <a:spLocks noGrp="1"/>
-          </p:cNvSpPr>
-          <p:nvPr>
-            <p:ph type="body" idx="1"/>
-          </p:nvPr>
-        </p:nvSpPr>
-        <p:spPr>
-          <a:xfrm>
-            <a:off x="268289" y="868681"/>
-            <a:ext cx="7529990" cy="5462272"/>
-          </a:xfrm>
-        </p:spPr>
-        <p:txBody>
-          <a:bodyPr>
-            <a:normAutofit/>
-          </a:bodyPr>
-          <a:lstStyle/>
-          <a:p>
-            <a:pPr marL="0" indent="0" algn="ctr">
-              <a:buNone/>
-            </a:pPr>
-            <a:r>
-              <a:rPr lang="en-US" u="sng" dirty="0"/>
-              <a:t>USRP Loopback Test</a:t>
-            </a:r>
-          </a:p>
-          <a:p>
-            <a:r>
-              <a:rPr lang="en-US" dirty="0"/>
-              <a:t>USRP Processing Delay must be accounted for in implementation for timing</a:t>
-            </a:r>
-          </a:p>
-          <a:p>
-            <a:r>
-              <a:rPr lang="en-US" dirty="0"/>
-              <a:t>Get USRP TX and RX processing delay</a:t>
-            </a:r>
-          </a:p>
-          <a:p>
-            <a:r>
-              <a:rPr lang="en-US" dirty="0"/>
-              <a:t>Processing Delay contains ADC, DAC, and Analog Frontend processing times. </a:t>
-            </a:r>
-          </a:p>
-          <a:p>
-            <a:r>
-              <a:rPr lang="en-US" dirty="0"/>
-              <a:t>An estimated constant delay was measured from USRP. Similar results from an additional USRPS with same wire.</a:t>
-            </a:r>
-          </a:p>
-          <a:p>
-            <a:r>
-              <a:rPr lang="en-US" dirty="0"/>
-              <a:t>Wired Cable used to connect. Wire Length is about 8 inches.</a:t>
-            </a:r>
-          </a:p>
-          <a:p>
-            <a:endParaRPr lang="en-US" dirty="0"/>
-          </a:p>
-        </p:txBody>
-      </p:sp>
-      <p:sp>
-        <p:nvSpPr>
-          <p:cNvPr id="5" name="Flowchart: Manual Operation 4">
-            <a:extLst>
-              <a:ext uri="{FF2B5EF4-FFF2-40B4-BE49-F238E27FC236}">
-                <a16:creationId xmlns:a16="http://schemas.microsoft.com/office/drawing/2014/main" id="{E85D2BF5-4856-D614-C9FB-C1EF1475BA1F}"/>
-              </a:ext>
-            </a:extLst>
-          </p:cNvPr>
-          <p:cNvSpPr/>
-          <p:nvPr/>
-        </p:nvSpPr>
-        <p:spPr>
-          <a:xfrm>
-            <a:off x="10199178" y="2296513"/>
-            <a:ext cx="553626" cy="336113"/>
-          </a:xfrm>
-          <a:prstGeom prst="flowChartManualOperation">
-            <a:avLst/>
-          </a:prstGeom>
-          <a:solidFill>
-            <a:schemeClr val="accent2"/>
-          </a:solidFill>
-        </p:spPr>
-        <p:style>
-          <a:lnRef idx="2">
-            <a:schemeClr val="dk1"/>
-          </a:lnRef>
-          <a:fillRef idx="1">
-            <a:schemeClr val="lt1"/>
-          </a:fillRef>
-          <a:effectRef idx="0">
-            <a:schemeClr val="dk1"/>
-          </a:effectRef>
-          <a:fontRef idx="minor">
-            <a:schemeClr val="dk1"/>
-          </a:fontRef>
-        </p:style>
-        <p:txBody>
-          <a:bodyPr rtlCol="0" anchor="ctr"/>
-          <a:lstStyle/>
-          <a:p>
-            <a:pPr marL="0" marR="0" lvl="0" indent="0" algn="ctr" defTabSz="914400" rtl="0" eaLnBrk="1" fontAlgn="auto" latinLnBrk="0" hangingPunct="1">
-              <a:lnSpc>
-                <a:spcPct val="100000"/>
-              </a:lnSpc>
-              <a:spcBef>
-                <a:spcPts val="0"/>
-              </a:spcBef>
-              <a:spcAft>
-                <a:spcPts val="0"/>
-              </a:spcAft>
-              <a:buClrTx/>
-              <a:buSzTx/>
-              <a:buFontTx/>
-              <a:buNone/>
-              <a:tabLst/>
-              <a:defRPr/>
-            </a:pPr>
-            <a:r>
-              <a:rPr kumimoji="0" lang="en-US" sz="800" b="1" i="0" u="none" strike="noStrike" kern="1200" cap="none" spc="0" normalizeH="0" baseline="0" noProof="0" dirty="0">
-                <a:ln>
-                  <a:noFill/>
-                </a:ln>
-                <a:solidFill>
-                  <a:prstClr val="black"/>
-                </a:solidFill>
-                <a:effectLst/>
-                <a:uLnTx/>
-                <a:uFillTx/>
-                <a:latin typeface="Calibri" panose="020F0502020204030204"/>
-                <a:ea typeface="+mn-ea"/>
-                <a:cs typeface="+mn-cs"/>
-              </a:rPr>
-              <a:t>RX</a:t>
-            </a:r>
-          </a:p>
-        </p:txBody>
-      </p:sp>
-      <p:sp>
-        <p:nvSpPr>
-          <p:cNvPr id="6" name="Rectangle 5">
-            <a:extLst>
-              <a:ext uri="{FF2B5EF4-FFF2-40B4-BE49-F238E27FC236}">
-                <a16:creationId xmlns:a16="http://schemas.microsoft.com/office/drawing/2014/main" id="{7CDF469A-68BF-B47F-19A3-FB6CB49263C1}"/>
-              </a:ext>
-            </a:extLst>
-          </p:cNvPr>
-          <p:cNvSpPr/>
-          <p:nvPr/>
-        </p:nvSpPr>
-        <p:spPr>
-          <a:xfrm>
-            <a:off x="9158987" y="2632626"/>
-            <a:ext cx="1593817" cy="571645"/>
-          </a:xfrm>
-          <a:prstGeom prst="rect">
-            <a:avLst/>
-          </a:prstGeom>
-        </p:spPr>
-        <p:style>
-          <a:lnRef idx="2">
-            <a:schemeClr val="dk1"/>
-          </a:lnRef>
-          <a:fillRef idx="1">
-            <a:schemeClr val="lt1"/>
-          </a:fillRef>
-          <a:effectRef idx="0">
-            <a:schemeClr val="dk1"/>
-          </a:effectRef>
-          <a:fontRef idx="minor">
-            <a:schemeClr val="dk1"/>
-          </a:fontRef>
-        </p:style>
-        <p:txBody>
-          <a:bodyPr rtlCol="0" anchor="ctr"/>
-          <a:lstStyle/>
-          <a:p>
-            <a:pPr marL="0" marR="0" lvl="0" indent="0" algn="ctr" defTabSz="914400" rtl="0" eaLnBrk="1" fontAlgn="auto" latinLnBrk="0" hangingPunct="1">
-              <a:lnSpc>
-                <a:spcPct val="100000"/>
-              </a:lnSpc>
-              <a:spcBef>
-                <a:spcPts val="0"/>
-              </a:spcBef>
-              <a:spcAft>
-                <a:spcPts val="0"/>
-              </a:spcAft>
-              <a:buClrTx/>
-              <a:buSzTx/>
-              <a:buFontTx/>
-              <a:buNone/>
-              <a:tabLst/>
-              <a:defRPr/>
-            </a:pPr>
-            <a:r>
-              <a:rPr kumimoji="0" lang="en-US" sz="1800" b="0" i="0" u="none" strike="noStrike" kern="1200" cap="none" spc="0" normalizeH="0" baseline="0" noProof="0" dirty="0">
-                <a:ln>
-                  <a:noFill/>
-                </a:ln>
-                <a:solidFill>
-                  <a:prstClr val="black"/>
-                </a:solidFill>
-                <a:effectLst/>
-                <a:uLnTx/>
-                <a:uFillTx/>
-                <a:latin typeface="Calibri" panose="020F0502020204030204"/>
-                <a:ea typeface="+mn-ea"/>
-                <a:cs typeface="+mn-cs"/>
-              </a:rPr>
-              <a:t>USRP</a:t>
-            </a:r>
-          </a:p>
-        </p:txBody>
-      </p:sp>
-      <p:sp>
-        <p:nvSpPr>
-          <p:cNvPr id="7" name="Flowchart: Manual Operation 6">
-            <a:extLst>
-              <a:ext uri="{FF2B5EF4-FFF2-40B4-BE49-F238E27FC236}">
-                <a16:creationId xmlns:a16="http://schemas.microsoft.com/office/drawing/2014/main" id="{8E7F71A0-BB57-9D4A-A1B5-F703F2BE6E03}"/>
-              </a:ext>
-            </a:extLst>
-          </p:cNvPr>
-          <p:cNvSpPr/>
-          <p:nvPr/>
-        </p:nvSpPr>
-        <p:spPr>
-          <a:xfrm>
-            <a:off x="9239777" y="2280029"/>
-            <a:ext cx="553626" cy="336113"/>
-          </a:xfrm>
-          <a:prstGeom prst="flowChartManualOperation">
-            <a:avLst/>
-          </a:prstGeom>
-          <a:solidFill>
-            <a:schemeClr val="accent1"/>
-          </a:solidFill>
-        </p:spPr>
-        <p:style>
-          <a:lnRef idx="2">
-            <a:schemeClr val="dk1"/>
-          </a:lnRef>
-          <a:fillRef idx="1">
-            <a:schemeClr val="lt1"/>
-          </a:fillRef>
-          <a:effectRef idx="0">
-            <a:schemeClr val="dk1"/>
-          </a:effectRef>
-          <a:fontRef idx="minor">
-            <a:schemeClr val="dk1"/>
-          </a:fontRef>
-        </p:style>
-        <p:txBody>
-          <a:bodyPr rtlCol="0" anchor="ctr"/>
-          <a:lstStyle/>
-          <a:p>
-            <a:pPr marL="0" marR="0" lvl="0" indent="0" algn="ctr" defTabSz="914400" rtl="0" eaLnBrk="1" fontAlgn="auto" latinLnBrk="0" hangingPunct="1">
-              <a:lnSpc>
-                <a:spcPct val="100000"/>
-              </a:lnSpc>
-              <a:spcBef>
-                <a:spcPts val="0"/>
-              </a:spcBef>
-              <a:spcAft>
-                <a:spcPts val="0"/>
-              </a:spcAft>
-              <a:buClrTx/>
-              <a:buSzTx/>
-              <a:buFontTx/>
-              <a:buNone/>
-              <a:tabLst/>
-              <a:defRPr/>
-            </a:pPr>
-            <a:r>
-              <a:rPr kumimoji="0" lang="en-US" sz="800" b="1" i="0" u="none" strike="noStrike" kern="1200" cap="none" spc="0" normalizeH="0" baseline="0" noProof="0" dirty="0">
-                <a:ln>
-                  <a:noFill/>
-                </a:ln>
-                <a:solidFill>
-                  <a:prstClr val="black"/>
-                </a:solidFill>
-                <a:effectLst/>
-                <a:uLnTx/>
-                <a:uFillTx/>
-                <a:latin typeface="Calibri" panose="020F0502020204030204"/>
-                <a:ea typeface="+mn-ea"/>
-                <a:cs typeface="+mn-cs"/>
-              </a:rPr>
-              <a:t>TX</a:t>
-            </a:r>
-          </a:p>
-        </p:txBody>
-      </p:sp>
-      <p:cxnSp>
-        <p:nvCxnSpPr>
-          <p:cNvPr id="8" name="Connector: Curved 7">
-            <a:extLst>
-              <a:ext uri="{FF2B5EF4-FFF2-40B4-BE49-F238E27FC236}">
-                <a16:creationId xmlns:a16="http://schemas.microsoft.com/office/drawing/2014/main" id="{E8403A7C-0E56-D59C-2E2A-357A9D5FE975}"/>
-              </a:ext>
-            </a:extLst>
-          </p:cNvPr>
-          <p:cNvCxnSpPr>
-            <a:stCxn id="7" idx="0"/>
-            <a:endCxn id="5" idx="0"/>
-          </p:cNvCxnSpPr>
-          <p:nvPr/>
-        </p:nvCxnSpPr>
-        <p:spPr>
-          <a:xfrm rot="16200000" flipH="1">
-            <a:off x="9988048" y="1808571"/>
-            <a:ext cx="16484" cy="959401"/>
-          </a:xfrm>
-          <a:prstGeom prst="curvedConnector3">
-            <a:avLst>
-              <a:gd name="adj1" fmla="val -1386799"/>
-            </a:avLst>
-          </a:prstGeom>
-          <a:ln>
-            <a:headEnd type="triangle"/>
-            <a:tailEnd type="triangle"/>
-          </a:ln>
-        </p:spPr>
-        <p:style>
-          <a:lnRef idx="2">
-            <a:schemeClr val="dk1"/>
-          </a:lnRef>
-          <a:fillRef idx="0">
-            <a:schemeClr val="dk1"/>
-          </a:fillRef>
-          <a:effectRef idx="1">
-            <a:schemeClr val="dk1"/>
-          </a:effectRef>
-          <a:fontRef idx="minor">
-            <a:schemeClr val="tx1"/>
-          </a:fontRef>
-        </p:style>
-      </p:cxnSp>
+          <a:bodyPr/>
+          <a:lstStyle/>
+          <a:p>
+            <a:r>
+              <a:rPr lang="en-US" dirty="0"/>
+              <a:t>GNU Radio</a:t>
+            </a:r>
+          </a:p>
+        </p:txBody>
+      </p:sp>
+      <p:sp>
+        <p:nvSpPr>
+          <p:cNvPr id="3" name="Content Placeholder 2">
+            <a:extLst>
+              <a:ext uri="{FF2B5EF4-FFF2-40B4-BE49-F238E27FC236}">
+                <a16:creationId xmlns:a16="http://schemas.microsoft.com/office/drawing/2014/main" id="{9D351875-483F-4CAE-933F-17E5C366566C}"/>
+              </a:ext>
+            </a:extLst>
+          </p:cNvPr>
+          <p:cNvSpPr>
+            <a:spLocks noGrp="1"/>
+          </p:cNvSpPr>
+          <p:nvPr>
+            <p:ph idx="1"/>
+          </p:nvPr>
+        </p:nvSpPr>
+        <p:spPr/>
+        <p:txBody>
+          <a:bodyPr/>
+          <a:lstStyle/>
+          <a:p>
+            <a:r>
+              <a:rPr lang="en-US" dirty="0"/>
+              <a:t>GNU radio is a tool that represents digital signal processing operations as “blocks”. Connecting blocks creates flowgraph which is executed in real time by the PC connected to the USRP</a:t>
+            </a:r>
+          </a:p>
+          <a:p>
+            <a:r>
+              <a:rPr lang="en-US" dirty="0"/>
+              <a:t>This relies on streaming raw samples from the USRP to the PC, so the sampling rate is limited.</a:t>
+            </a:r>
+          </a:p>
+        </p:txBody>
+      </p:sp>
     </p:spTree>
     <p:extLst>
       <p:ext uri="{BB962C8B-B14F-4D97-AF65-F5344CB8AC3E}">
-        <p14:creationId xmlns:p14="http://schemas.microsoft.com/office/powerpoint/2010/main" val="3432104902"/>
+        <p14:creationId xmlns:p14="http://schemas.microsoft.com/office/powerpoint/2010/main" val="4085849887"/>
       </p:ext>
     </p:extLst>
   </p:cSld>
   <p:clrMapOvr>
     <a:masterClrMapping/>
   </p:clrMapOvr>
-  <p:transition spd="med"/>
 </p:sld>
 </file>
 
@@ -16004,7 +15694,7 @@
           <p:cNvPr id="2" name="Title 1">
             <a:extLst>
               <a:ext uri="{FF2B5EF4-FFF2-40B4-BE49-F238E27FC236}">
-                <a16:creationId xmlns:a16="http://schemas.microsoft.com/office/drawing/2014/main" id="{474FBC8C-7155-6884-00C1-4E81E87EEE32}"/>
+                <a16:creationId xmlns:a16="http://schemas.microsoft.com/office/drawing/2014/main" id="{B0790838-C938-415D-9907-A951351DC619}"/>
               </a:ext>
             </a:extLst>
           </p:cNvPr>
@@ -16017,143 +15707,143 @@
         </p:nvSpPr>
         <p:spPr/>
         <p:txBody>
-          <a:bodyPr>
-            <a:normAutofit fontScale="90000"/>
-          </a:bodyPr>
-          <a:lstStyle/>
-          <a:p>
-            <a:pPr algn="ctr"/>
-            <a:r>
-              <a:rPr lang="en-US" dirty="0"/>
-              <a:t>USRP Processing Delay</a:t>
-            </a:r>
-          </a:p>
-        </p:txBody>
-      </p:sp>
-      <p:sp>
-        <p:nvSpPr>
-          <p:cNvPr id="3" name="Text Placeholder 2">
-            <a:extLst>
-              <a:ext uri="{FF2B5EF4-FFF2-40B4-BE49-F238E27FC236}">
-                <a16:creationId xmlns:a16="http://schemas.microsoft.com/office/drawing/2014/main" id="{E9412DD0-E338-3F7D-7351-6ECC28968CCA}"/>
-              </a:ext>
-            </a:extLst>
-          </p:cNvPr>
-          <p:cNvSpPr>
-            <a:spLocks noGrp="1"/>
-          </p:cNvSpPr>
-          <p:nvPr>
-            <p:ph type="body" idx="1"/>
-          </p:nvPr>
-        </p:nvSpPr>
-        <p:spPr>
-          <a:xfrm>
-            <a:off x="268819" y="4934309"/>
-            <a:ext cx="10894292" cy="1396644"/>
-          </a:xfrm>
-        </p:spPr>
-        <p:txBody>
-          <a:bodyPr>
-            <a:normAutofit/>
-          </a:bodyPr>
-          <a:lstStyle/>
-          <a:p>
-            <a:r>
-              <a:rPr lang="en-US" sz="2200" dirty="0"/>
-              <a:t>Estimated Processing Delay = 119 samples at 200M = 0.595 us</a:t>
-            </a:r>
-          </a:p>
-          <a:p>
-            <a:r>
-              <a:rPr lang="en-US" sz="2200" dirty="0"/>
-              <a:t>Processing includes TX path, RX path and Wire length. </a:t>
-            </a:r>
-          </a:p>
-          <a:p>
-            <a:r>
-              <a:rPr lang="en-US" sz="2200" dirty="0"/>
-              <a:t>Wire Length = 8 inches </a:t>
-            </a:r>
-          </a:p>
-          <a:p>
-            <a:endParaRPr lang="en-US" sz="2200" dirty="0"/>
-          </a:p>
-          <a:p>
+          <a:bodyPr/>
+          <a:lstStyle/>
+          <a:p>
+            <a:r>
+              <a:rPr lang="en-US" dirty="0"/>
+              <a:t>Custom Modules</a:t>
+            </a:r>
+          </a:p>
+        </p:txBody>
+      </p:sp>
+      <p:sp>
+        <p:nvSpPr>
+          <p:cNvPr id="3" name="Content Placeholder 2">
+            <a:extLst>
+              <a:ext uri="{FF2B5EF4-FFF2-40B4-BE49-F238E27FC236}">
+                <a16:creationId xmlns:a16="http://schemas.microsoft.com/office/drawing/2014/main" id="{3A98DB2E-A2B2-4E0E-B06B-6AA559173139}"/>
+              </a:ext>
+            </a:extLst>
+          </p:cNvPr>
+          <p:cNvSpPr>
+            <a:spLocks noGrp="1"/>
+          </p:cNvSpPr>
+          <p:nvPr>
+            <p:ph idx="1"/>
+          </p:nvPr>
+        </p:nvSpPr>
+        <p:spPr/>
+        <p:txBody>
+          <a:bodyPr/>
+          <a:lstStyle/>
+          <a:p>
+            <a:r>
+              <a:rPr lang="en-US" dirty="0"/>
+              <a:t>To create custom blocks, there are two options</a:t>
+            </a:r>
+          </a:p>
+          <a:p>
+            <a:pPr marL="971550" lvl="1" indent="-514350">
+              <a:buFont typeface="+mj-lt"/>
+              <a:buAutoNum type="arabicPeriod"/>
+            </a:pPr>
+            <a:r>
+              <a:rPr lang="en-US" dirty="0"/>
+              <a:t>Embedded Python Block</a:t>
+            </a:r>
+          </a:p>
+          <a:p>
+            <a:pPr lvl="2"/>
+            <a:r>
+              <a:rPr lang="en-US" dirty="0"/>
+              <a:t>Code is stored as text data </a:t>
+            </a:r>
+            <a:r>
+              <a:rPr lang="en-US" b="1" dirty="0"/>
+              <a:t>inside</a:t>
+            </a:r>
+            <a:r>
+              <a:rPr lang="en-US" dirty="0"/>
+              <a:t> the flowgraph, </a:t>
+            </a:r>
+            <a:r>
+              <a:rPr lang="en-US" u="sng" dirty="0"/>
+              <a:t>making reuse difficult </a:t>
+            </a:r>
+          </a:p>
+          <a:p>
+            <a:pPr marL="971550" lvl="1" indent="-514350">
+              <a:buFont typeface="+mj-lt"/>
+              <a:buAutoNum type="arabicPeriod"/>
+            </a:pPr>
+            <a:r>
+              <a:rPr lang="en-US" dirty="0"/>
+              <a:t>Out-Of-Tree Custom Module</a:t>
+            </a:r>
+          </a:p>
+          <a:p>
+            <a:pPr lvl="2"/>
+            <a:r>
+              <a:rPr lang="en-US" dirty="0"/>
+              <a:t>Allows you to create a custom library of GNU radio blocks that can be reused</a:t>
+            </a:r>
+          </a:p>
+          <a:p>
+            <a:pPr lvl="2"/>
+            <a:r>
+              <a:rPr lang="en-US" dirty="0"/>
+              <a:t>Requires </a:t>
+            </a:r>
+            <a:r>
+              <a:rPr lang="en-US" dirty="0" err="1"/>
+              <a:t>sudo</a:t>
+            </a:r>
+            <a:r>
+              <a:rPr lang="en-US" dirty="0"/>
+              <a:t> access and installation </a:t>
+            </a:r>
+          </a:p>
+          <a:p>
+            <a:pPr lvl="2"/>
             <a:endParaRPr lang="en-US" dirty="0"/>
           </a:p>
-        </p:txBody>
-      </p:sp>
-      <p:pic>
-        <p:nvPicPr>
-          <p:cNvPr id="12" name="Picture 11">
-            <a:extLst>
-              <a:ext uri="{FF2B5EF4-FFF2-40B4-BE49-F238E27FC236}">
-                <a16:creationId xmlns:a16="http://schemas.microsoft.com/office/drawing/2014/main" id="{41987B11-1033-C0AE-6B89-50F86C657643}"/>
-              </a:ext>
-            </a:extLst>
-          </p:cNvPr>
-          <p:cNvPicPr>
-            <a:picLocks noChangeAspect="1"/>
-          </p:cNvPicPr>
-          <p:nvPr/>
-        </p:nvPicPr>
-        <p:blipFill>
-          <a:blip r:embed="rId3"/>
-          <a:stretch>
-            <a:fillRect/>
-          </a:stretch>
-        </p:blipFill>
-        <p:spPr>
-          <a:xfrm>
-            <a:off x="478804" y="781230"/>
-            <a:ext cx="5334000" cy="4000500"/>
-          </a:xfrm>
-          <a:prstGeom prst="rect">
-            <a:avLst/>
-          </a:prstGeom>
-        </p:spPr>
-      </p:pic>
-      <p:pic>
-        <p:nvPicPr>
-          <p:cNvPr id="13" name="Picture 12">
-            <a:extLst>
-              <a:ext uri="{FF2B5EF4-FFF2-40B4-BE49-F238E27FC236}">
-                <a16:creationId xmlns:a16="http://schemas.microsoft.com/office/drawing/2014/main" id="{265437B3-C0CD-7008-09A6-142A196F5A77}"/>
-              </a:ext>
-            </a:extLst>
-          </p:cNvPr>
-          <p:cNvPicPr>
-            <a:picLocks noChangeAspect="1"/>
-          </p:cNvPicPr>
-          <p:nvPr/>
-        </p:nvPicPr>
-        <p:blipFill>
-          <a:blip r:embed="rId4"/>
-          <a:stretch>
-            <a:fillRect/>
-          </a:stretch>
-        </p:blipFill>
-        <p:spPr>
-          <a:xfrm>
-            <a:off x="6265323" y="933809"/>
-            <a:ext cx="5334000" cy="4000500"/>
-          </a:xfrm>
-          <a:prstGeom prst="rect">
-            <a:avLst/>
-          </a:prstGeom>
-        </p:spPr>
-      </p:pic>
+          <a:p>
+            <a:r>
+              <a:rPr lang="en-US" dirty="0"/>
+              <a:t>OOT Modules are preferred, but we don’t have </a:t>
+            </a:r>
+            <a:r>
+              <a:rPr lang="en-US" dirty="0" err="1"/>
+              <a:t>sudo</a:t>
+            </a:r>
+            <a:r>
+              <a:rPr lang="en-US" dirty="0"/>
+              <a:t> access to the lab computers.</a:t>
+            </a:r>
+          </a:p>
+          <a:p>
+            <a:pPr marL="971550" lvl="1" indent="-514350">
+              <a:buFont typeface="+mj-lt"/>
+              <a:buAutoNum type="arabicPeriod"/>
+            </a:pPr>
+            <a:endParaRPr lang="en-US" dirty="0"/>
+          </a:p>
+          <a:p>
+            <a:endParaRPr lang="en-US" dirty="0"/>
+          </a:p>
+        </p:txBody>
+      </p:sp>
     </p:spTree>
     <p:extLst>
       <p:ext uri="{BB962C8B-B14F-4D97-AF65-F5344CB8AC3E}">
-        <p14:creationId xmlns:p14="http://schemas.microsoft.com/office/powerpoint/2010/main" val="3268644363"/>
+        <p14:creationId xmlns:p14="http://schemas.microsoft.com/office/powerpoint/2010/main" val="535671311"/>
       </p:ext>
     </p:extLst>
   </p:cSld>
   <p:clrMapOvr>
     <a:masterClrMapping/>
   </p:clrMapOvr>
-  <p:transition spd="med"/>
 </p:sld>
 </file>
 
@@ -16309,6 +15999,723 @@
           <p:cNvPr id="2" name="Title 1">
             <a:extLst>
               <a:ext uri="{FF2B5EF4-FFF2-40B4-BE49-F238E27FC236}">
+                <a16:creationId xmlns:a16="http://schemas.microsoft.com/office/drawing/2014/main" id="{DB422D67-9CDB-464C-8A7B-64A24D02D1F6}"/>
+              </a:ext>
+            </a:extLst>
+          </p:cNvPr>
+          <p:cNvSpPr>
+            <a:spLocks noGrp="1"/>
+          </p:cNvSpPr>
+          <p:nvPr>
+            <p:ph type="title"/>
+          </p:nvPr>
+        </p:nvSpPr>
+        <p:spPr/>
+        <p:txBody>
+          <a:bodyPr/>
+          <a:lstStyle/>
+          <a:p>
+            <a:r>
+              <a:rPr lang="en-US" dirty="0"/>
+              <a:t>Embedded Python Blocks</a:t>
+            </a:r>
+          </a:p>
+        </p:txBody>
+      </p:sp>
+      <p:sp>
+        <p:nvSpPr>
+          <p:cNvPr id="3" name="Content Placeholder 2">
+            <a:extLst>
+              <a:ext uri="{FF2B5EF4-FFF2-40B4-BE49-F238E27FC236}">
+                <a16:creationId xmlns:a16="http://schemas.microsoft.com/office/drawing/2014/main" id="{9D7F8DE3-711D-455F-9841-460B2C9711AE}"/>
+              </a:ext>
+            </a:extLst>
+          </p:cNvPr>
+          <p:cNvSpPr>
+            <a:spLocks noGrp="1"/>
+          </p:cNvSpPr>
+          <p:nvPr>
+            <p:ph idx="1"/>
+          </p:nvPr>
+        </p:nvSpPr>
+        <p:spPr/>
+        <p:txBody>
+          <a:bodyPr/>
+          <a:lstStyle/>
+          <a:p>
+            <a:r>
+              <a:rPr lang="en-US" dirty="0" err="1"/>
+              <a:t>Emedded</a:t>
+            </a:r>
+            <a:r>
+              <a:rPr lang="en-US" dirty="0"/>
+              <a:t> python blocks have code embedded as raw text in the </a:t>
+            </a:r>
+            <a:r>
+              <a:rPr lang="en-US" dirty="0" err="1"/>
+              <a:t>grc</a:t>
+            </a:r>
+            <a:r>
+              <a:rPr lang="en-US" dirty="0"/>
+              <a:t> file.</a:t>
+            </a:r>
+          </a:p>
+          <a:p>
+            <a:pPr lvl="1"/>
+            <a:r>
+              <a:rPr lang="en-US" dirty="0"/>
+              <a:t>This makes it difficult to perform version control, maintain a library of usable code, and perform file </a:t>
+            </a:r>
+            <a:r>
+              <a:rPr lang="en-US" dirty="0" err="1"/>
+              <a:t>pperations</a:t>
+            </a:r>
+            <a:endParaRPr lang="en-US" dirty="0"/>
+          </a:p>
+          <a:p>
+            <a:pPr lvl="1"/>
+            <a:r>
+              <a:rPr lang="en-US" dirty="0"/>
+              <a:t>Moreover, the default editor is notepad</a:t>
+            </a:r>
+          </a:p>
+          <a:p>
+            <a:r>
+              <a:rPr lang="en-US" dirty="0"/>
+              <a:t>We can only fix the </a:t>
+            </a:r>
+            <a:r>
+              <a:rPr lang="en-US" dirty="0">
+                <a:hlinkClick r:id="rId2"/>
+              </a:rPr>
+              <a:t>notepad issue…</a:t>
+            </a:r>
+            <a:endParaRPr lang="en-US" dirty="0"/>
+          </a:p>
+        </p:txBody>
+      </p:sp>
+    </p:spTree>
+    <p:extLst>
+      <p:ext uri="{BB962C8B-B14F-4D97-AF65-F5344CB8AC3E}">
+        <p14:creationId xmlns:p14="http://schemas.microsoft.com/office/powerpoint/2010/main" val="2950894718"/>
+      </p:ext>
+    </p:extLst>
+  </p:cSld>
+  <p:clrMapOvr>
+    <a:masterClrMapping/>
+  </p:clrMapOvr>
+</p:sld>
+</file>
+
+<file path=ppt/slides/slide61.xml><?xml version="1.0" encoding="utf-8"?>
+<p:sld xmlns:a="http://schemas.openxmlformats.org/drawingml/2006/main" xmlns:r="http://schemas.openxmlformats.org/officeDocument/2006/relationships" xmlns:p="http://schemas.openxmlformats.org/presentationml/2006/main">
+  <p:cSld>
+    <p:spTree>
+      <p:nvGrpSpPr>
+        <p:cNvPr id="1" name=""/>
+        <p:cNvGrpSpPr/>
+        <p:nvPr/>
+      </p:nvGrpSpPr>
+      <p:grpSpPr>
+        <a:xfrm>
+          <a:off x="0" y="0"/>
+          <a:ext cx="0" cy="0"/>
+          <a:chOff x="0" y="0"/>
+          <a:chExt cx="0" cy="0"/>
+        </a:xfrm>
+      </p:grpSpPr>
+      <p:sp>
+        <p:nvSpPr>
+          <p:cNvPr id="2" name="Title 1">
+            <a:extLst>
+              <a:ext uri="{FF2B5EF4-FFF2-40B4-BE49-F238E27FC236}">
+                <a16:creationId xmlns:a16="http://schemas.microsoft.com/office/drawing/2014/main" id="{474FBC8C-7155-6884-00C1-4E81E87EEE32}"/>
+              </a:ext>
+            </a:extLst>
+          </p:cNvPr>
+          <p:cNvSpPr>
+            <a:spLocks noGrp="1"/>
+          </p:cNvSpPr>
+          <p:nvPr>
+            <p:ph type="title"/>
+          </p:nvPr>
+        </p:nvSpPr>
+        <p:spPr/>
+        <p:txBody>
+          <a:bodyPr>
+            <a:normAutofit fontScale="90000"/>
+          </a:bodyPr>
+          <a:lstStyle/>
+          <a:p>
+            <a:pPr algn="ctr"/>
+            <a:r>
+              <a:rPr lang="en-US" dirty="0"/>
+              <a:t>USRP Processing Delay</a:t>
+            </a:r>
+          </a:p>
+        </p:txBody>
+      </p:sp>
+      <p:sp>
+        <p:nvSpPr>
+          <p:cNvPr id="3" name="Text Placeholder 2">
+            <a:extLst>
+              <a:ext uri="{FF2B5EF4-FFF2-40B4-BE49-F238E27FC236}">
+                <a16:creationId xmlns:a16="http://schemas.microsoft.com/office/drawing/2014/main" id="{E9412DD0-E338-3F7D-7351-6ECC28968CCA}"/>
+              </a:ext>
+            </a:extLst>
+          </p:cNvPr>
+          <p:cNvSpPr>
+            <a:spLocks noGrp="1"/>
+          </p:cNvSpPr>
+          <p:nvPr>
+            <p:ph type="body" idx="1"/>
+          </p:nvPr>
+        </p:nvSpPr>
+        <p:spPr>
+          <a:xfrm>
+            <a:off x="268289" y="868681"/>
+            <a:ext cx="7529990" cy="5462272"/>
+          </a:xfrm>
+        </p:spPr>
+        <p:txBody>
+          <a:bodyPr>
+            <a:normAutofit/>
+          </a:bodyPr>
+          <a:lstStyle/>
+          <a:p>
+            <a:pPr marL="0" indent="0" algn="ctr">
+              <a:buNone/>
+            </a:pPr>
+            <a:r>
+              <a:rPr lang="en-US" u="sng" dirty="0"/>
+              <a:t>USRP Loopback Test</a:t>
+            </a:r>
+          </a:p>
+          <a:p>
+            <a:r>
+              <a:rPr lang="en-US" dirty="0"/>
+              <a:t>USRP Processing Delay must be accounted for in implementation for timing</a:t>
+            </a:r>
+          </a:p>
+          <a:p>
+            <a:r>
+              <a:rPr lang="en-US" dirty="0"/>
+              <a:t>Get USRP TX and RX processing delay</a:t>
+            </a:r>
+          </a:p>
+          <a:p>
+            <a:r>
+              <a:rPr lang="en-US" dirty="0"/>
+              <a:t>Processing Delay contains ADC, DAC, and Analog Frontend processing times. </a:t>
+            </a:r>
+          </a:p>
+          <a:p>
+            <a:r>
+              <a:rPr lang="en-US" dirty="0"/>
+              <a:t>An estimated constant delay was measured from USRP. Similar results from an additional USRPS with same wire.</a:t>
+            </a:r>
+          </a:p>
+          <a:p>
+            <a:r>
+              <a:rPr lang="en-US" dirty="0"/>
+              <a:t>Wired Cable used to connect. Wire Length is about 8 inches.</a:t>
+            </a:r>
+          </a:p>
+          <a:p>
+            <a:endParaRPr lang="en-US" dirty="0"/>
+          </a:p>
+        </p:txBody>
+      </p:sp>
+      <p:sp>
+        <p:nvSpPr>
+          <p:cNvPr id="5" name="Flowchart: Manual Operation 4">
+            <a:extLst>
+              <a:ext uri="{FF2B5EF4-FFF2-40B4-BE49-F238E27FC236}">
+                <a16:creationId xmlns:a16="http://schemas.microsoft.com/office/drawing/2014/main" id="{E85D2BF5-4856-D614-C9FB-C1EF1475BA1F}"/>
+              </a:ext>
+            </a:extLst>
+          </p:cNvPr>
+          <p:cNvSpPr/>
+          <p:nvPr/>
+        </p:nvSpPr>
+        <p:spPr>
+          <a:xfrm>
+            <a:off x="10199178" y="2296513"/>
+            <a:ext cx="553626" cy="336113"/>
+          </a:xfrm>
+          <a:prstGeom prst="flowChartManualOperation">
+            <a:avLst/>
+          </a:prstGeom>
+          <a:solidFill>
+            <a:schemeClr val="accent2"/>
+          </a:solidFill>
+        </p:spPr>
+        <p:style>
+          <a:lnRef idx="2">
+            <a:schemeClr val="dk1"/>
+          </a:lnRef>
+          <a:fillRef idx="1">
+            <a:schemeClr val="lt1"/>
+          </a:fillRef>
+          <a:effectRef idx="0">
+            <a:schemeClr val="dk1"/>
+          </a:effectRef>
+          <a:fontRef idx="minor">
+            <a:schemeClr val="dk1"/>
+          </a:fontRef>
+        </p:style>
+        <p:txBody>
+          <a:bodyPr rtlCol="0" anchor="ctr"/>
+          <a:lstStyle/>
+          <a:p>
+            <a:pPr marL="0" marR="0" lvl="0" indent="0" algn="ctr" defTabSz="914400" rtl="0" eaLnBrk="1" fontAlgn="auto" latinLnBrk="0" hangingPunct="1">
+              <a:lnSpc>
+                <a:spcPct val="100000"/>
+              </a:lnSpc>
+              <a:spcBef>
+                <a:spcPts val="0"/>
+              </a:spcBef>
+              <a:spcAft>
+                <a:spcPts val="0"/>
+              </a:spcAft>
+              <a:buClrTx/>
+              <a:buSzTx/>
+              <a:buFontTx/>
+              <a:buNone/>
+              <a:tabLst/>
+              <a:defRPr/>
+            </a:pPr>
+            <a:r>
+              <a:rPr kumimoji="0" lang="en-US" sz="800" b="1" i="0" u="none" strike="noStrike" kern="1200" cap="none" spc="0" normalizeH="0" baseline="0" noProof="0" dirty="0">
+                <a:ln>
+                  <a:noFill/>
+                </a:ln>
+                <a:solidFill>
+                  <a:prstClr val="black"/>
+                </a:solidFill>
+                <a:effectLst/>
+                <a:uLnTx/>
+                <a:uFillTx/>
+                <a:latin typeface="Calibri" panose="020F0502020204030204"/>
+                <a:ea typeface="+mn-ea"/>
+                <a:cs typeface="+mn-cs"/>
+              </a:rPr>
+              <a:t>RX</a:t>
+            </a:r>
+          </a:p>
+        </p:txBody>
+      </p:sp>
+      <p:sp>
+        <p:nvSpPr>
+          <p:cNvPr id="6" name="Rectangle 5">
+            <a:extLst>
+              <a:ext uri="{FF2B5EF4-FFF2-40B4-BE49-F238E27FC236}">
+                <a16:creationId xmlns:a16="http://schemas.microsoft.com/office/drawing/2014/main" id="{7CDF469A-68BF-B47F-19A3-FB6CB49263C1}"/>
+              </a:ext>
+            </a:extLst>
+          </p:cNvPr>
+          <p:cNvSpPr/>
+          <p:nvPr/>
+        </p:nvSpPr>
+        <p:spPr>
+          <a:xfrm>
+            <a:off x="9158987" y="2632626"/>
+            <a:ext cx="1593817" cy="571645"/>
+          </a:xfrm>
+          <a:prstGeom prst="rect">
+            <a:avLst/>
+          </a:prstGeom>
+        </p:spPr>
+        <p:style>
+          <a:lnRef idx="2">
+            <a:schemeClr val="dk1"/>
+          </a:lnRef>
+          <a:fillRef idx="1">
+            <a:schemeClr val="lt1"/>
+          </a:fillRef>
+          <a:effectRef idx="0">
+            <a:schemeClr val="dk1"/>
+          </a:effectRef>
+          <a:fontRef idx="minor">
+            <a:schemeClr val="dk1"/>
+          </a:fontRef>
+        </p:style>
+        <p:txBody>
+          <a:bodyPr rtlCol="0" anchor="ctr"/>
+          <a:lstStyle/>
+          <a:p>
+            <a:pPr marL="0" marR="0" lvl="0" indent="0" algn="ctr" defTabSz="914400" rtl="0" eaLnBrk="1" fontAlgn="auto" latinLnBrk="0" hangingPunct="1">
+              <a:lnSpc>
+                <a:spcPct val="100000"/>
+              </a:lnSpc>
+              <a:spcBef>
+                <a:spcPts val="0"/>
+              </a:spcBef>
+              <a:spcAft>
+                <a:spcPts val="0"/>
+              </a:spcAft>
+              <a:buClrTx/>
+              <a:buSzTx/>
+              <a:buFontTx/>
+              <a:buNone/>
+              <a:tabLst/>
+              <a:defRPr/>
+            </a:pPr>
+            <a:r>
+              <a:rPr kumimoji="0" lang="en-US" sz="1800" b="0" i="0" u="none" strike="noStrike" kern="1200" cap="none" spc="0" normalizeH="0" baseline="0" noProof="0" dirty="0">
+                <a:ln>
+                  <a:noFill/>
+                </a:ln>
+                <a:solidFill>
+                  <a:prstClr val="black"/>
+                </a:solidFill>
+                <a:effectLst/>
+                <a:uLnTx/>
+                <a:uFillTx/>
+                <a:latin typeface="Calibri" panose="020F0502020204030204"/>
+                <a:ea typeface="+mn-ea"/>
+                <a:cs typeface="+mn-cs"/>
+              </a:rPr>
+              <a:t>USRP</a:t>
+            </a:r>
+          </a:p>
+        </p:txBody>
+      </p:sp>
+      <p:sp>
+        <p:nvSpPr>
+          <p:cNvPr id="7" name="Flowchart: Manual Operation 6">
+            <a:extLst>
+              <a:ext uri="{FF2B5EF4-FFF2-40B4-BE49-F238E27FC236}">
+                <a16:creationId xmlns:a16="http://schemas.microsoft.com/office/drawing/2014/main" id="{8E7F71A0-BB57-9D4A-A1B5-F703F2BE6E03}"/>
+              </a:ext>
+            </a:extLst>
+          </p:cNvPr>
+          <p:cNvSpPr/>
+          <p:nvPr/>
+        </p:nvSpPr>
+        <p:spPr>
+          <a:xfrm>
+            <a:off x="9239777" y="2280029"/>
+            <a:ext cx="553626" cy="336113"/>
+          </a:xfrm>
+          <a:prstGeom prst="flowChartManualOperation">
+            <a:avLst/>
+          </a:prstGeom>
+          <a:solidFill>
+            <a:schemeClr val="accent1"/>
+          </a:solidFill>
+        </p:spPr>
+        <p:style>
+          <a:lnRef idx="2">
+            <a:schemeClr val="dk1"/>
+          </a:lnRef>
+          <a:fillRef idx="1">
+            <a:schemeClr val="lt1"/>
+          </a:fillRef>
+          <a:effectRef idx="0">
+            <a:schemeClr val="dk1"/>
+          </a:effectRef>
+          <a:fontRef idx="minor">
+            <a:schemeClr val="dk1"/>
+          </a:fontRef>
+        </p:style>
+        <p:txBody>
+          <a:bodyPr rtlCol="0" anchor="ctr"/>
+          <a:lstStyle/>
+          <a:p>
+            <a:pPr marL="0" marR="0" lvl="0" indent="0" algn="ctr" defTabSz="914400" rtl="0" eaLnBrk="1" fontAlgn="auto" latinLnBrk="0" hangingPunct="1">
+              <a:lnSpc>
+                <a:spcPct val="100000"/>
+              </a:lnSpc>
+              <a:spcBef>
+                <a:spcPts val="0"/>
+              </a:spcBef>
+              <a:spcAft>
+                <a:spcPts val="0"/>
+              </a:spcAft>
+              <a:buClrTx/>
+              <a:buSzTx/>
+              <a:buFontTx/>
+              <a:buNone/>
+              <a:tabLst/>
+              <a:defRPr/>
+            </a:pPr>
+            <a:r>
+              <a:rPr kumimoji="0" lang="en-US" sz="800" b="1" i="0" u="none" strike="noStrike" kern="1200" cap="none" spc="0" normalizeH="0" baseline="0" noProof="0" dirty="0">
+                <a:ln>
+                  <a:noFill/>
+                </a:ln>
+                <a:solidFill>
+                  <a:prstClr val="black"/>
+                </a:solidFill>
+                <a:effectLst/>
+                <a:uLnTx/>
+                <a:uFillTx/>
+                <a:latin typeface="Calibri" panose="020F0502020204030204"/>
+                <a:ea typeface="+mn-ea"/>
+                <a:cs typeface="+mn-cs"/>
+              </a:rPr>
+              <a:t>TX</a:t>
+            </a:r>
+          </a:p>
+        </p:txBody>
+      </p:sp>
+      <p:cxnSp>
+        <p:nvCxnSpPr>
+          <p:cNvPr id="8" name="Connector: Curved 7">
+            <a:extLst>
+              <a:ext uri="{FF2B5EF4-FFF2-40B4-BE49-F238E27FC236}">
+                <a16:creationId xmlns:a16="http://schemas.microsoft.com/office/drawing/2014/main" id="{E8403A7C-0E56-D59C-2E2A-357A9D5FE975}"/>
+              </a:ext>
+            </a:extLst>
+          </p:cNvPr>
+          <p:cNvCxnSpPr>
+            <a:stCxn id="7" idx="0"/>
+            <a:endCxn id="5" idx="0"/>
+          </p:cNvCxnSpPr>
+          <p:nvPr/>
+        </p:nvCxnSpPr>
+        <p:spPr>
+          <a:xfrm rot="16200000" flipH="1">
+            <a:off x="9988048" y="1808571"/>
+            <a:ext cx="16484" cy="959401"/>
+          </a:xfrm>
+          <a:prstGeom prst="curvedConnector3">
+            <a:avLst>
+              <a:gd name="adj1" fmla="val -1386799"/>
+            </a:avLst>
+          </a:prstGeom>
+          <a:ln>
+            <a:headEnd type="triangle"/>
+            <a:tailEnd type="triangle"/>
+          </a:ln>
+        </p:spPr>
+        <p:style>
+          <a:lnRef idx="2">
+            <a:schemeClr val="dk1"/>
+          </a:lnRef>
+          <a:fillRef idx="0">
+            <a:schemeClr val="dk1"/>
+          </a:fillRef>
+          <a:effectRef idx="1">
+            <a:schemeClr val="dk1"/>
+          </a:effectRef>
+          <a:fontRef idx="minor">
+            <a:schemeClr val="tx1"/>
+          </a:fontRef>
+        </p:style>
+      </p:cxnSp>
+    </p:spTree>
+    <p:extLst>
+      <p:ext uri="{BB962C8B-B14F-4D97-AF65-F5344CB8AC3E}">
+        <p14:creationId xmlns:p14="http://schemas.microsoft.com/office/powerpoint/2010/main" val="3432104902"/>
+      </p:ext>
+    </p:extLst>
+  </p:cSld>
+  <p:clrMapOvr>
+    <a:masterClrMapping/>
+  </p:clrMapOvr>
+  <p:transition spd="med"/>
+</p:sld>
+</file>
+
+<file path=ppt/slides/slide62.xml><?xml version="1.0" encoding="utf-8"?>
+<p:sld xmlns:a="http://schemas.openxmlformats.org/drawingml/2006/main" xmlns:r="http://schemas.openxmlformats.org/officeDocument/2006/relationships" xmlns:p="http://schemas.openxmlformats.org/presentationml/2006/main">
+  <p:cSld>
+    <p:spTree>
+      <p:nvGrpSpPr>
+        <p:cNvPr id="1" name=""/>
+        <p:cNvGrpSpPr/>
+        <p:nvPr/>
+      </p:nvGrpSpPr>
+      <p:grpSpPr>
+        <a:xfrm>
+          <a:off x="0" y="0"/>
+          <a:ext cx="0" cy="0"/>
+          <a:chOff x="0" y="0"/>
+          <a:chExt cx="0" cy="0"/>
+        </a:xfrm>
+      </p:grpSpPr>
+      <p:sp>
+        <p:nvSpPr>
+          <p:cNvPr id="2" name="Title 1">
+            <a:extLst>
+              <a:ext uri="{FF2B5EF4-FFF2-40B4-BE49-F238E27FC236}">
+                <a16:creationId xmlns:a16="http://schemas.microsoft.com/office/drawing/2014/main" id="{474FBC8C-7155-6884-00C1-4E81E87EEE32}"/>
+              </a:ext>
+            </a:extLst>
+          </p:cNvPr>
+          <p:cNvSpPr>
+            <a:spLocks noGrp="1"/>
+          </p:cNvSpPr>
+          <p:nvPr>
+            <p:ph type="title"/>
+          </p:nvPr>
+        </p:nvSpPr>
+        <p:spPr/>
+        <p:txBody>
+          <a:bodyPr>
+            <a:normAutofit fontScale="90000"/>
+          </a:bodyPr>
+          <a:lstStyle/>
+          <a:p>
+            <a:pPr algn="ctr"/>
+            <a:r>
+              <a:rPr lang="en-US" dirty="0"/>
+              <a:t>USRP Processing Delay</a:t>
+            </a:r>
+          </a:p>
+        </p:txBody>
+      </p:sp>
+      <p:sp>
+        <p:nvSpPr>
+          <p:cNvPr id="3" name="Text Placeholder 2">
+            <a:extLst>
+              <a:ext uri="{FF2B5EF4-FFF2-40B4-BE49-F238E27FC236}">
+                <a16:creationId xmlns:a16="http://schemas.microsoft.com/office/drawing/2014/main" id="{E9412DD0-E338-3F7D-7351-6ECC28968CCA}"/>
+              </a:ext>
+            </a:extLst>
+          </p:cNvPr>
+          <p:cNvSpPr>
+            <a:spLocks noGrp="1"/>
+          </p:cNvSpPr>
+          <p:nvPr>
+            <p:ph type="body" idx="1"/>
+          </p:nvPr>
+        </p:nvSpPr>
+        <p:spPr>
+          <a:xfrm>
+            <a:off x="268819" y="4934309"/>
+            <a:ext cx="10894292" cy="1396644"/>
+          </a:xfrm>
+        </p:spPr>
+        <p:txBody>
+          <a:bodyPr>
+            <a:normAutofit/>
+          </a:bodyPr>
+          <a:lstStyle/>
+          <a:p>
+            <a:r>
+              <a:rPr lang="en-US" sz="2200" dirty="0"/>
+              <a:t>Estimated Processing Delay = 119 samples at 200M = 0.595 us</a:t>
+            </a:r>
+          </a:p>
+          <a:p>
+            <a:r>
+              <a:rPr lang="en-US" sz="2200" dirty="0"/>
+              <a:t>Processing includes TX path, RX path and Wire length. </a:t>
+            </a:r>
+          </a:p>
+          <a:p>
+            <a:r>
+              <a:rPr lang="en-US" sz="2200" dirty="0"/>
+              <a:t>Wire Length = 8 inches </a:t>
+            </a:r>
+          </a:p>
+          <a:p>
+            <a:endParaRPr lang="en-US" sz="2200" dirty="0"/>
+          </a:p>
+          <a:p>
+            <a:endParaRPr lang="en-US" dirty="0"/>
+          </a:p>
+        </p:txBody>
+      </p:sp>
+      <p:pic>
+        <p:nvPicPr>
+          <p:cNvPr id="12" name="Picture 11">
+            <a:extLst>
+              <a:ext uri="{FF2B5EF4-FFF2-40B4-BE49-F238E27FC236}">
+                <a16:creationId xmlns:a16="http://schemas.microsoft.com/office/drawing/2014/main" id="{41987B11-1033-C0AE-6B89-50F86C657643}"/>
+              </a:ext>
+            </a:extLst>
+          </p:cNvPr>
+          <p:cNvPicPr>
+            <a:picLocks noChangeAspect="1"/>
+          </p:cNvPicPr>
+          <p:nvPr/>
+        </p:nvPicPr>
+        <p:blipFill>
+          <a:blip r:embed="rId3"/>
+          <a:stretch>
+            <a:fillRect/>
+          </a:stretch>
+        </p:blipFill>
+        <p:spPr>
+          <a:xfrm>
+            <a:off x="478804" y="781230"/>
+            <a:ext cx="5334000" cy="4000500"/>
+          </a:xfrm>
+          <a:prstGeom prst="rect">
+            <a:avLst/>
+          </a:prstGeom>
+        </p:spPr>
+      </p:pic>
+      <p:pic>
+        <p:nvPicPr>
+          <p:cNvPr id="13" name="Picture 12">
+            <a:extLst>
+              <a:ext uri="{FF2B5EF4-FFF2-40B4-BE49-F238E27FC236}">
+                <a16:creationId xmlns:a16="http://schemas.microsoft.com/office/drawing/2014/main" id="{265437B3-C0CD-7008-09A6-142A196F5A77}"/>
+              </a:ext>
+            </a:extLst>
+          </p:cNvPr>
+          <p:cNvPicPr>
+            <a:picLocks noChangeAspect="1"/>
+          </p:cNvPicPr>
+          <p:nvPr/>
+        </p:nvPicPr>
+        <p:blipFill>
+          <a:blip r:embed="rId4"/>
+          <a:stretch>
+            <a:fillRect/>
+          </a:stretch>
+        </p:blipFill>
+        <p:spPr>
+          <a:xfrm>
+            <a:off x="6265323" y="933809"/>
+            <a:ext cx="5334000" cy="4000500"/>
+          </a:xfrm>
+          <a:prstGeom prst="rect">
+            <a:avLst/>
+          </a:prstGeom>
+        </p:spPr>
+      </p:pic>
+    </p:spTree>
+    <p:extLst>
+      <p:ext uri="{BB962C8B-B14F-4D97-AF65-F5344CB8AC3E}">
+        <p14:creationId xmlns:p14="http://schemas.microsoft.com/office/powerpoint/2010/main" val="3268644363"/>
+      </p:ext>
+    </p:extLst>
+  </p:cSld>
+  <p:clrMapOvr>
+    <a:masterClrMapping/>
+  </p:clrMapOvr>
+  <p:transition spd="med"/>
+</p:sld>
+</file>
+
+<file path=ppt/slides/slide63.xml><?xml version="1.0" encoding="utf-8"?>
+<p:sld xmlns:a="http://schemas.openxmlformats.org/drawingml/2006/main" xmlns:r="http://schemas.openxmlformats.org/officeDocument/2006/relationships" xmlns:p="http://schemas.openxmlformats.org/presentationml/2006/main">
+  <p:cSld>
+    <p:spTree>
+      <p:nvGrpSpPr>
+        <p:cNvPr id="1" name=""/>
+        <p:cNvGrpSpPr/>
+        <p:nvPr/>
+      </p:nvGrpSpPr>
+      <p:grpSpPr>
+        <a:xfrm>
+          <a:off x="0" y="0"/>
+          <a:ext cx="0" cy="0"/>
+          <a:chOff x="0" y="0"/>
+          <a:chExt cx="0" cy="0"/>
+        </a:xfrm>
+      </p:grpSpPr>
+      <p:sp>
+        <p:nvSpPr>
+          <p:cNvPr id="2" name="Title 1">
+            <a:extLst>
+              <a:ext uri="{FF2B5EF4-FFF2-40B4-BE49-F238E27FC236}">
                 <a16:creationId xmlns:a16="http://schemas.microsoft.com/office/drawing/2014/main" id="{F4C454C9-957E-08D0-497A-D4E7854B08F7}"/>
               </a:ext>
             </a:extLst>
@@ -16452,7 +16859,7 @@
 </p:sld>
 </file>
 
-<file path=ppt/slides/slide61.xml><?xml version="1.0" encoding="utf-8"?>
+<file path=ppt/slides/slide64.xml><?xml version="1.0" encoding="utf-8"?>
 <p:sld xmlns:a="http://schemas.openxmlformats.org/drawingml/2006/main" xmlns:r="http://schemas.openxmlformats.org/officeDocument/2006/relationships" xmlns:p="http://schemas.openxmlformats.org/presentationml/2006/main">
   <p:cSld>
     <p:spTree>
@@ -16649,7 +17056,7 @@
 </p:sld>
 </file>
 
-<file path=ppt/slides/slide62.xml><?xml version="1.0" encoding="utf-8"?>
+<file path=ppt/slides/slide65.xml><?xml version="1.0" encoding="utf-8"?>
 <p:sld xmlns:a="http://schemas.openxmlformats.org/drawingml/2006/main" xmlns:r="http://schemas.openxmlformats.org/officeDocument/2006/relationships" xmlns:p="http://schemas.openxmlformats.org/presentationml/2006/main">
   <p:cSld>
     <p:spTree>
@@ -16811,7 +17218,7 @@
 </p:sld>
 </file>
 
-<file path=ppt/slides/slide63.xml><?xml version="1.0" encoding="utf-8"?>
+<file path=ppt/slides/slide66.xml><?xml version="1.0" encoding="utf-8"?>
 <p:sld xmlns:a="http://schemas.openxmlformats.org/drawingml/2006/main" xmlns:r="http://schemas.openxmlformats.org/officeDocument/2006/relationships" xmlns:p="http://schemas.openxmlformats.org/presentationml/2006/main">
   <p:cSld>
     <p:spTree>
@@ -17576,7 +17983,7 @@
 </p:sld>
 </file>
 
-<file path=ppt/slides/slide64.xml><?xml version="1.0" encoding="utf-8"?>
+<file path=ppt/slides/slide67.xml><?xml version="1.0" encoding="utf-8"?>
 <p:sld xmlns:a="http://schemas.openxmlformats.org/drawingml/2006/main" xmlns:r="http://schemas.openxmlformats.org/officeDocument/2006/relationships" xmlns:p="http://schemas.openxmlformats.org/presentationml/2006/main">
   <p:cSld>
     <p:spTree>
@@ -17621,8 +18028,8 @@
           </a:p>
         </p:txBody>
       </p:sp>
-      <mc:AlternateContent xmlns:mc="http://schemas.openxmlformats.org/markup-compatibility/2006">
-        <mc:Choice xmlns:a14="http://schemas.microsoft.com/office/drawing/2010/main" Requires="a14">
+      <mc:AlternateContent xmlns:mc="http://schemas.openxmlformats.org/markup-compatibility/2006" xmlns:a14="http://schemas.microsoft.com/office/drawing/2010/main">
+        <mc:Choice Requires="a14">
           <p:sp>
             <p:nvSpPr>
               <p:cNvPr id="3" name="Content Placeholder 2">
@@ -17786,7 +18193,7 @@
             </p:txBody>
           </p:sp>
         </mc:Choice>
-        <mc:Fallback>
+        <mc:Fallback xmlns="">
           <p:sp>
             <p:nvSpPr>
               <p:cNvPr id="3" name="Content Placeholder 2">
@@ -17946,7 +18353,7 @@
 </p:sld>
 </file>
 
-<file path=ppt/slides/slide65.xml><?xml version="1.0" encoding="utf-8"?>
+<file path=ppt/slides/slide68.xml><?xml version="1.0" encoding="utf-8"?>
 <p:sld xmlns:a="http://schemas.openxmlformats.org/drawingml/2006/main" xmlns:r="http://schemas.openxmlformats.org/officeDocument/2006/relationships" xmlns:p="http://schemas.openxmlformats.org/presentationml/2006/main">
   <p:cSld>
     <p:spTree>
@@ -19949,7 +20356,7 @@
 </p:sld>
 </file>
 
-<file path=ppt/slides/slide66.xml><?xml version="1.0" encoding="utf-8"?>
+<file path=ppt/slides/slide69.xml><?xml version="1.0" encoding="utf-8"?>
 <p:sld xmlns:a="http://schemas.openxmlformats.org/drawingml/2006/main" xmlns:r="http://schemas.openxmlformats.org/officeDocument/2006/relationships" xmlns:p="http://schemas.openxmlformats.org/presentationml/2006/main">
   <p:cSld>
     <p:spTree>
@@ -20400,7 +20807,111 @@
 </p:sld>
 </file>
 
-<file path=ppt/slides/slide67.xml><?xml version="1.0" encoding="utf-8"?>
+<file path=ppt/slides/slide7.xml><?xml version="1.0" encoding="utf-8"?>
+<p:sld xmlns:a="http://schemas.openxmlformats.org/drawingml/2006/main" xmlns:r="http://schemas.openxmlformats.org/officeDocument/2006/relationships" xmlns:p="http://schemas.openxmlformats.org/presentationml/2006/main">
+  <p:cSld>
+    <p:spTree>
+      <p:nvGrpSpPr>
+        <p:cNvPr id="1" name=""/>
+        <p:cNvGrpSpPr/>
+        <p:nvPr/>
+      </p:nvGrpSpPr>
+      <p:grpSpPr>
+        <a:xfrm>
+          <a:off x="0" y="0"/>
+          <a:ext cx="0" cy="0"/>
+          <a:chOff x="0" y="0"/>
+          <a:chExt cx="0" cy="0"/>
+        </a:xfrm>
+      </p:grpSpPr>
+      <p:sp>
+        <p:nvSpPr>
+          <p:cNvPr id="2" name="Title 1">
+            <a:extLst>
+              <a:ext uri="{FF2B5EF4-FFF2-40B4-BE49-F238E27FC236}">
+                <a16:creationId xmlns:a16="http://schemas.microsoft.com/office/drawing/2014/main" id="{1903E083-42E2-FF06-2E47-757E342DEB9C}"/>
+              </a:ext>
+            </a:extLst>
+          </p:cNvPr>
+          <p:cNvSpPr>
+            <a:spLocks noGrp="1"/>
+          </p:cNvSpPr>
+          <p:nvPr>
+            <p:ph type="title"/>
+          </p:nvPr>
+        </p:nvSpPr>
+        <p:spPr/>
+        <p:txBody>
+          <a:bodyPr/>
+          <a:lstStyle/>
+          <a:p>
+            <a:r>
+              <a:rPr lang="en-US" dirty="0"/>
+              <a:t>Towards our AFE + DC + FPGA goal</a:t>
+            </a:r>
+          </a:p>
+        </p:txBody>
+      </p:sp>
+      <p:sp>
+        <p:nvSpPr>
+          <p:cNvPr id="3" name="Content Placeholder 2">
+            <a:extLst>
+              <a:ext uri="{FF2B5EF4-FFF2-40B4-BE49-F238E27FC236}">
+                <a16:creationId xmlns:a16="http://schemas.microsoft.com/office/drawing/2014/main" id="{5347E4BB-D6CB-2FFC-A6DC-36F59867DC03}"/>
+              </a:ext>
+            </a:extLst>
+          </p:cNvPr>
+          <p:cNvSpPr>
+            <a:spLocks noGrp="1"/>
+          </p:cNvSpPr>
+          <p:nvPr>
+            <p:ph idx="1"/>
+          </p:nvPr>
+        </p:nvSpPr>
+        <p:spPr/>
+        <p:txBody>
+          <a:bodyPr/>
+          <a:lstStyle/>
+          <a:p>
+            <a:r>
+              <a:rPr lang="en-US" dirty="0"/>
+              <a:t>There is no customer-friendly “supported” way to get what we want. </a:t>
+            </a:r>
+          </a:p>
+          <a:p>
+            <a:r>
+              <a:rPr lang="en-US" dirty="0"/>
+              <a:t>Fortunately, the USRP host and FGPA code is all open source. We can edit the FPGA code ourselves and “hijack” the system for our goals.</a:t>
+            </a:r>
+          </a:p>
+          <a:p>
+            <a:r>
+              <a:rPr lang="en-US" dirty="0"/>
+              <a:t>This requires learning about important subsystems of the USRP and many hours of code reading/searching</a:t>
+            </a:r>
+          </a:p>
+          <a:p>
+            <a:r>
+              <a:rPr lang="en-US" dirty="0"/>
+              <a:t>Hopefully, we can condense this by explaining some major parts, and establish a framework for projects to start from.</a:t>
+            </a:r>
+          </a:p>
+        </p:txBody>
+      </p:sp>
+    </p:spTree>
+    <p:extLst>
+      <p:ext uri="{BB962C8B-B14F-4D97-AF65-F5344CB8AC3E}">
+        <p14:creationId xmlns:p14="http://schemas.microsoft.com/office/powerpoint/2010/main" val="3986253339"/>
+      </p:ext>
+    </p:extLst>
+  </p:cSld>
+  <p:clrMapOvr>
+    <a:masterClrMapping/>
+  </p:clrMapOvr>
+</p:sld>
+</file>
+
+<file path=ppt/slides/slide70.xml><?xml version="1.0" encoding="utf-8"?>
 <p:sld xmlns:a="http://schemas.openxmlformats.org/drawingml/2006/main" xmlns:r="http://schemas.openxmlformats.org/officeDocument/2006/relationships" xmlns:p="http://schemas.openxmlformats.org/presentationml/2006/main">
   <p:cSld>
     <p:spTree>
@@ -20540,482 +21051,6 @@
 </p:sld>
 </file>
 
-<file path=ppt/slides/slide68.xml><?xml version="1.0" encoding="utf-8"?>
-<p:sld xmlns:a="http://schemas.openxmlformats.org/drawingml/2006/main" xmlns:r="http://schemas.openxmlformats.org/officeDocument/2006/relationships" xmlns:p="http://schemas.openxmlformats.org/presentationml/2006/main">
-  <p:cSld>
-    <p:spTree>
-      <p:nvGrpSpPr>
-        <p:cNvPr id="1" name=""/>
-        <p:cNvGrpSpPr/>
-        <p:nvPr/>
-      </p:nvGrpSpPr>
-      <p:grpSpPr>
-        <a:xfrm>
-          <a:off x="0" y="0"/>
-          <a:ext cx="0" cy="0"/>
-          <a:chOff x="0" y="0"/>
-          <a:chExt cx="0" cy="0"/>
-        </a:xfrm>
-      </p:grpSpPr>
-      <p:sp>
-        <p:nvSpPr>
-          <p:cNvPr id="2" name="Title 1">
-            <a:extLst>
-              <a:ext uri="{FF2B5EF4-FFF2-40B4-BE49-F238E27FC236}">
-                <a16:creationId xmlns:a16="http://schemas.microsoft.com/office/drawing/2014/main" id="{CA9E4B47-DF75-4C60-B62F-B8CA2086AF8D}"/>
-              </a:ext>
-            </a:extLst>
-          </p:cNvPr>
-          <p:cNvSpPr>
-            <a:spLocks noGrp="1"/>
-          </p:cNvSpPr>
-          <p:nvPr>
-            <p:ph type="title"/>
-          </p:nvPr>
-        </p:nvSpPr>
-        <p:spPr/>
-        <p:txBody>
-          <a:bodyPr/>
-          <a:lstStyle/>
-          <a:p>
-            <a:r>
-              <a:rPr lang="en-US" dirty="0"/>
-              <a:t>Synchronization</a:t>
-            </a:r>
-          </a:p>
-        </p:txBody>
-      </p:sp>
-      <p:sp>
-        <p:nvSpPr>
-          <p:cNvPr id="3" name="Content Placeholder 2">
-            <a:extLst>
-              <a:ext uri="{FF2B5EF4-FFF2-40B4-BE49-F238E27FC236}">
-                <a16:creationId xmlns:a16="http://schemas.microsoft.com/office/drawing/2014/main" id="{0AD24E95-293D-46AE-BFE9-E660D97F172B}"/>
-              </a:ext>
-            </a:extLst>
-          </p:cNvPr>
-          <p:cNvSpPr>
-            <a:spLocks noGrp="1"/>
-          </p:cNvSpPr>
-          <p:nvPr>
-            <p:ph idx="1"/>
-          </p:nvPr>
-        </p:nvSpPr>
-        <p:spPr/>
-        <p:txBody>
-          <a:bodyPr/>
-          <a:lstStyle/>
-          <a:p>
-            <a:r>
-              <a:rPr lang="en-US" dirty="0">
-                <a:hlinkClick r:id="rId2"/>
-              </a:rPr>
-              <a:t>https://www.youtube.com/watch?v=6TOU0f039g8</a:t>
-            </a:r>
-            <a:r>
-              <a:rPr lang="en-US" dirty="0"/>
-              <a:t> </a:t>
-            </a:r>
-          </a:p>
-          <a:p>
-            <a:r>
-              <a:rPr lang="en-US" dirty="0">
-                <a:hlinkClick r:id="rId3"/>
-              </a:rPr>
-              <a:t>https://files.ettus.com/manual/page_sync.html</a:t>
-            </a:r>
-            <a:r>
-              <a:rPr lang="en-US" dirty="0"/>
-              <a:t> </a:t>
-            </a:r>
-          </a:p>
-          <a:p>
-            <a:r>
-              <a:rPr lang="en-US" dirty="0">
-                <a:hlinkClick r:id="rId4"/>
-              </a:rPr>
-              <a:t>https://www.mail-archive.com/usrp-users@lists.ettus.com/msg14581.html</a:t>
-            </a:r>
-            <a:r>
-              <a:rPr lang="en-US" dirty="0"/>
-              <a:t> </a:t>
-            </a:r>
-          </a:p>
-        </p:txBody>
-      </p:sp>
-    </p:spTree>
-    <p:extLst>
-      <p:ext uri="{BB962C8B-B14F-4D97-AF65-F5344CB8AC3E}">
-        <p14:creationId xmlns:p14="http://schemas.microsoft.com/office/powerpoint/2010/main" val="696938929"/>
-      </p:ext>
-    </p:extLst>
-  </p:cSld>
-  <p:clrMapOvr>
-    <a:masterClrMapping/>
-  </p:clrMapOvr>
-</p:sld>
-</file>
-
-<file path=ppt/slides/slide69.xml><?xml version="1.0" encoding="utf-8"?>
-<p:sld xmlns:a="http://schemas.openxmlformats.org/drawingml/2006/main" xmlns:r="http://schemas.openxmlformats.org/officeDocument/2006/relationships" xmlns:p="http://schemas.openxmlformats.org/presentationml/2006/main">
-  <p:cSld>
-    <p:spTree>
-      <p:nvGrpSpPr>
-        <p:cNvPr id="1" name=""/>
-        <p:cNvGrpSpPr/>
-        <p:nvPr/>
-      </p:nvGrpSpPr>
-      <p:grpSpPr>
-        <a:xfrm>
-          <a:off x="0" y="0"/>
-          <a:ext cx="0" cy="0"/>
-          <a:chOff x="0" y="0"/>
-          <a:chExt cx="0" cy="0"/>
-        </a:xfrm>
-      </p:grpSpPr>
-      <p:sp>
-        <p:nvSpPr>
-          <p:cNvPr id="2" name="Title 1">
-            <a:extLst>
-              <a:ext uri="{FF2B5EF4-FFF2-40B4-BE49-F238E27FC236}">
-                <a16:creationId xmlns:a16="http://schemas.microsoft.com/office/drawing/2014/main" id="{E06A6DA9-9A1B-4B6C-9276-E41C443ED478}"/>
-              </a:ext>
-            </a:extLst>
-          </p:cNvPr>
-          <p:cNvSpPr>
-            <a:spLocks noGrp="1"/>
-          </p:cNvSpPr>
-          <p:nvPr>
-            <p:ph type="title"/>
-          </p:nvPr>
-        </p:nvSpPr>
-        <p:spPr/>
-        <p:txBody>
-          <a:bodyPr/>
-          <a:lstStyle/>
-          <a:p>
-            <a:r>
-              <a:rPr lang="en-US" dirty="0"/>
-              <a:t>RFNOC library</a:t>
-            </a:r>
-          </a:p>
-        </p:txBody>
-      </p:sp>
-      <p:sp>
-        <p:nvSpPr>
-          <p:cNvPr id="3" name="Content Placeholder 2">
-            <a:extLst>
-              <a:ext uri="{FF2B5EF4-FFF2-40B4-BE49-F238E27FC236}">
-                <a16:creationId xmlns:a16="http://schemas.microsoft.com/office/drawing/2014/main" id="{08B6D7EF-1D02-4C47-B3EC-A280514ADF10}"/>
-              </a:ext>
-            </a:extLst>
-          </p:cNvPr>
-          <p:cNvSpPr>
-            <a:spLocks noGrp="1"/>
-          </p:cNvSpPr>
-          <p:nvPr>
-            <p:ph idx="1"/>
-          </p:nvPr>
-        </p:nvSpPr>
-        <p:spPr/>
-        <p:txBody>
-          <a:bodyPr/>
-          <a:lstStyle/>
-          <a:p>
-            <a:r>
-              <a:rPr lang="en-US" dirty="0"/>
-              <a:t>/</a:t>
-            </a:r>
-            <a:r>
-              <a:rPr lang="en-US" dirty="0" err="1"/>
-              <a:t>afs</a:t>
-            </a:r>
-            <a:r>
-              <a:rPr lang="en-US" dirty="0"/>
-              <a:t>/eecs.umich.edu/</a:t>
-            </a:r>
-            <a:r>
-              <a:rPr lang="en-US" dirty="0" err="1"/>
-              <a:t>spvlsi</a:t>
-            </a:r>
-            <a:r>
-              <a:rPr lang="en-US" dirty="0"/>
-              <a:t>/users/</a:t>
-            </a:r>
-            <a:r>
-              <a:rPr lang="en-US" dirty="0" err="1"/>
-              <a:t>wangston</a:t>
-            </a:r>
-            <a:r>
-              <a:rPr lang="en-US" dirty="0"/>
-              <a:t>/OSLA/</a:t>
-            </a:r>
-            <a:r>
-              <a:rPr lang="en-US" dirty="0" err="1"/>
-              <a:t>bpsk</a:t>
-            </a:r>
-            <a:r>
-              <a:rPr lang="en-US" dirty="0"/>
-              <a:t>/</a:t>
-            </a:r>
-            <a:r>
-              <a:rPr lang="en-US" dirty="0" err="1"/>
-              <a:t>ww_uhd</a:t>
-            </a:r>
-            <a:r>
-              <a:rPr lang="en-US" dirty="0"/>
-              <a:t>/</a:t>
-            </a:r>
-            <a:r>
-              <a:rPr lang="en-US" dirty="0" err="1"/>
-              <a:t>fpga</a:t>
-            </a:r>
-            <a:r>
-              <a:rPr lang="en-US" dirty="0"/>
-              <a:t>/usrp3/lib/</a:t>
-            </a:r>
-            <a:r>
-              <a:rPr lang="en-US" dirty="0" err="1"/>
-              <a:t>rfnoc</a:t>
-            </a:r>
-            <a:r>
-              <a:rPr lang="en-US" dirty="0"/>
-              <a:t>/moving_sum.v:8</a:t>
-            </a:r>
-          </a:p>
-        </p:txBody>
-      </p:sp>
-    </p:spTree>
-    <p:extLst>
-      <p:ext uri="{BB962C8B-B14F-4D97-AF65-F5344CB8AC3E}">
-        <p14:creationId xmlns:p14="http://schemas.microsoft.com/office/powerpoint/2010/main" val="2958452029"/>
-      </p:ext>
-    </p:extLst>
-  </p:cSld>
-  <p:clrMapOvr>
-    <a:masterClrMapping/>
-  </p:clrMapOvr>
-</p:sld>
-</file>
-
-<file path=ppt/slides/slide7.xml><?xml version="1.0" encoding="utf-8"?>
-<p:sld xmlns:a="http://schemas.openxmlformats.org/drawingml/2006/main" xmlns:r="http://schemas.openxmlformats.org/officeDocument/2006/relationships" xmlns:p="http://schemas.openxmlformats.org/presentationml/2006/main">
-  <p:cSld>
-    <p:spTree>
-      <p:nvGrpSpPr>
-        <p:cNvPr id="1" name=""/>
-        <p:cNvGrpSpPr/>
-        <p:nvPr/>
-      </p:nvGrpSpPr>
-      <p:grpSpPr>
-        <a:xfrm>
-          <a:off x="0" y="0"/>
-          <a:ext cx="0" cy="0"/>
-          <a:chOff x="0" y="0"/>
-          <a:chExt cx="0" cy="0"/>
-        </a:xfrm>
-      </p:grpSpPr>
-      <p:sp>
-        <p:nvSpPr>
-          <p:cNvPr id="2" name="Title 1">
-            <a:extLst>
-              <a:ext uri="{FF2B5EF4-FFF2-40B4-BE49-F238E27FC236}">
-                <a16:creationId xmlns:a16="http://schemas.microsoft.com/office/drawing/2014/main" id="{1903E083-42E2-FF06-2E47-757E342DEB9C}"/>
-              </a:ext>
-            </a:extLst>
-          </p:cNvPr>
-          <p:cNvSpPr>
-            <a:spLocks noGrp="1"/>
-          </p:cNvSpPr>
-          <p:nvPr>
-            <p:ph type="title"/>
-          </p:nvPr>
-        </p:nvSpPr>
-        <p:spPr/>
-        <p:txBody>
-          <a:bodyPr/>
-          <a:lstStyle/>
-          <a:p>
-            <a:r>
-              <a:rPr lang="en-US" dirty="0"/>
-              <a:t>Towards our AFE + DC + FPGA goal</a:t>
-            </a:r>
-          </a:p>
-        </p:txBody>
-      </p:sp>
-      <p:sp>
-        <p:nvSpPr>
-          <p:cNvPr id="3" name="Content Placeholder 2">
-            <a:extLst>
-              <a:ext uri="{FF2B5EF4-FFF2-40B4-BE49-F238E27FC236}">
-                <a16:creationId xmlns:a16="http://schemas.microsoft.com/office/drawing/2014/main" id="{5347E4BB-D6CB-2FFC-A6DC-36F59867DC03}"/>
-              </a:ext>
-            </a:extLst>
-          </p:cNvPr>
-          <p:cNvSpPr>
-            <a:spLocks noGrp="1"/>
-          </p:cNvSpPr>
-          <p:nvPr>
-            <p:ph idx="1"/>
-          </p:nvPr>
-        </p:nvSpPr>
-        <p:spPr/>
-        <p:txBody>
-          <a:bodyPr/>
-          <a:lstStyle/>
-          <a:p>
-            <a:r>
-              <a:rPr lang="en-US" dirty="0"/>
-              <a:t>There is no customer-friendly “supported” way to get what we want. </a:t>
-            </a:r>
-          </a:p>
-          <a:p>
-            <a:r>
-              <a:rPr lang="en-US" dirty="0"/>
-              <a:t>Fortunately, the USRP host and FGPA code is all open source. We can edit the FPGA code ourselves and “hijack” the system for our goals.</a:t>
-            </a:r>
-          </a:p>
-          <a:p>
-            <a:r>
-              <a:rPr lang="en-US" dirty="0"/>
-              <a:t>This requires learning about important subsystems of the USRP and many hours of code reading/searching</a:t>
-            </a:r>
-          </a:p>
-          <a:p>
-            <a:r>
-              <a:rPr lang="en-US" dirty="0"/>
-              <a:t>Hopefully, we can condense this by explaining some major parts, and establish a framework for projects to start from.</a:t>
-            </a:r>
-          </a:p>
-        </p:txBody>
-      </p:sp>
-    </p:spTree>
-    <p:extLst>
-      <p:ext uri="{BB962C8B-B14F-4D97-AF65-F5344CB8AC3E}">
-        <p14:creationId xmlns:p14="http://schemas.microsoft.com/office/powerpoint/2010/main" val="3986253339"/>
-      </p:ext>
-    </p:extLst>
-  </p:cSld>
-  <p:clrMapOvr>
-    <a:masterClrMapping/>
-  </p:clrMapOvr>
-</p:sld>
-</file>
-
-<file path=ppt/slides/slide70.xml><?xml version="1.0" encoding="utf-8"?>
-<p:sld xmlns:a="http://schemas.openxmlformats.org/drawingml/2006/main" xmlns:r="http://schemas.openxmlformats.org/officeDocument/2006/relationships" xmlns:p="http://schemas.openxmlformats.org/presentationml/2006/main">
-  <p:cSld>
-    <p:spTree>
-      <p:nvGrpSpPr>
-        <p:cNvPr id="1" name=""/>
-        <p:cNvGrpSpPr/>
-        <p:nvPr/>
-      </p:nvGrpSpPr>
-      <p:grpSpPr>
-        <a:xfrm>
-          <a:off x="0" y="0"/>
-          <a:ext cx="0" cy="0"/>
-          <a:chOff x="0" y="0"/>
-          <a:chExt cx="0" cy="0"/>
-        </a:xfrm>
-      </p:grpSpPr>
-      <p:sp>
-        <p:nvSpPr>
-          <p:cNvPr id="2" name="Title 1">
-            <a:extLst>
-              <a:ext uri="{FF2B5EF4-FFF2-40B4-BE49-F238E27FC236}">
-                <a16:creationId xmlns:a16="http://schemas.microsoft.com/office/drawing/2014/main" id="{EB30B9E5-3894-4669-BEF0-62F0D30C1633}"/>
-              </a:ext>
-            </a:extLst>
-          </p:cNvPr>
-          <p:cNvSpPr>
-            <a:spLocks noGrp="1"/>
-          </p:cNvSpPr>
-          <p:nvPr>
-            <p:ph type="title"/>
-          </p:nvPr>
-        </p:nvSpPr>
-        <p:spPr/>
-        <p:txBody>
-          <a:bodyPr/>
-          <a:lstStyle/>
-          <a:p>
-            <a:r>
-              <a:rPr lang="en-US" dirty="0"/>
-              <a:t>Useful USRP settings</a:t>
-            </a:r>
-          </a:p>
-        </p:txBody>
-      </p:sp>
-      <p:sp>
-        <p:nvSpPr>
-          <p:cNvPr id="3" name="Content Placeholder 2">
-            <a:extLst>
-              <a:ext uri="{FF2B5EF4-FFF2-40B4-BE49-F238E27FC236}">
-                <a16:creationId xmlns:a16="http://schemas.microsoft.com/office/drawing/2014/main" id="{65E7B0EF-3635-47A4-B427-2F5E683DE1AB}"/>
-              </a:ext>
-            </a:extLst>
-          </p:cNvPr>
-          <p:cNvSpPr>
-            <a:spLocks noGrp="1"/>
-          </p:cNvSpPr>
-          <p:nvPr>
-            <p:ph idx="1"/>
-          </p:nvPr>
-        </p:nvSpPr>
-        <p:spPr/>
-        <p:txBody>
-          <a:bodyPr/>
-          <a:lstStyle/>
-          <a:p>
-            <a:r>
-              <a:rPr lang="en-US" dirty="0">
-                <a:hlinkClick r:id="rId2"/>
-              </a:rPr>
-              <a:t>https://files.ettus.com/manual/classuhd_1_1usrp_1_1multi__usrp.html#a41cc3c774451d0a2c5f69cd8df0f9f06</a:t>
-            </a:r>
-            <a:r>
-              <a:rPr lang="en-US" dirty="0"/>
-              <a:t> </a:t>
-            </a:r>
-          </a:p>
-          <a:p>
-            <a:endParaRPr lang="en-US" dirty="0"/>
-          </a:p>
-          <a:p>
-            <a:r>
-              <a:rPr lang="en-US" dirty="0">
-                <a:hlinkClick r:id="rId3"/>
-              </a:rPr>
-              <a:t>https://files.ettus.com/manual/page_dboards.html</a:t>
-            </a:r>
-            <a:r>
-              <a:rPr lang="en-US" dirty="0"/>
-              <a:t> </a:t>
-            </a:r>
-          </a:p>
-          <a:p>
-            <a:pPr lvl="1"/>
-            <a:r>
-              <a:rPr lang="en-US" dirty="0"/>
-              <a:t>Daughterboard setting limits</a:t>
-            </a:r>
-          </a:p>
-        </p:txBody>
-      </p:sp>
-    </p:spTree>
-    <p:extLst>
-      <p:ext uri="{BB962C8B-B14F-4D97-AF65-F5344CB8AC3E}">
-        <p14:creationId xmlns:p14="http://schemas.microsoft.com/office/powerpoint/2010/main" val="1174058820"/>
-      </p:ext>
-    </p:extLst>
-  </p:cSld>
-  <p:clrMapOvr>
-    <a:masterClrMapping/>
-  </p:clrMapOvr>
-</p:sld>
-</file>
-
 <file path=ppt/slides/slide71.xml><?xml version="1.0" encoding="utf-8"?>
 <p:sld xmlns:a="http://schemas.openxmlformats.org/drawingml/2006/main" xmlns:r="http://schemas.openxmlformats.org/officeDocument/2006/relationships" xmlns:p="http://schemas.openxmlformats.org/presentationml/2006/main">
   <p:cSld>
@@ -21038,7 +21073,7 @@
           <p:cNvPr id="2" name="Title 1">
             <a:extLst>
               <a:ext uri="{FF2B5EF4-FFF2-40B4-BE49-F238E27FC236}">
-                <a16:creationId xmlns:a16="http://schemas.microsoft.com/office/drawing/2014/main" id="{5691D859-9488-4143-BBA1-B538C9FB9452}"/>
+                <a16:creationId xmlns:a16="http://schemas.microsoft.com/office/drawing/2014/main" id="{CA9E4B47-DF75-4C60-B62F-B8CA2086AF8D}"/>
               </a:ext>
             </a:extLst>
           </p:cNvPr>
@@ -21056,7 +21091,7 @@
           <a:p>
             <a:r>
               <a:rPr lang="en-US" dirty="0"/>
-              <a:t>RF tuning and front end settling time</a:t>
+              <a:t>Synchronization</a:t>
             </a:r>
           </a:p>
         </p:txBody>
@@ -21066,7 +21101,7 @@
           <p:cNvPr id="3" name="Content Placeholder 2">
             <a:extLst>
               <a:ext uri="{FF2B5EF4-FFF2-40B4-BE49-F238E27FC236}">
-                <a16:creationId xmlns:a16="http://schemas.microsoft.com/office/drawing/2014/main" id="{EE98E38B-F9F5-4FCC-BE8F-1FD92DEB536B}"/>
+                <a16:creationId xmlns:a16="http://schemas.microsoft.com/office/drawing/2014/main" id="{0AD24E95-293D-46AE-BFE9-E660D97F172B}"/>
               </a:ext>
             </a:extLst>
           </p:cNvPr>
@@ -21086,7 +21121,31 @@
               <a:rPr lang="en-US" dirty="0">
                 <a:hlinkClick r:id="rId2"/>
               </a:rPr>
-              <a:t>https://files.ettus.com/manual/page_general.html</a:t>
+              <a:t>https://www.youtube.com/watch?v=6TOU0f039g8</a:t>
+            </a:r>
+            <a:r>
+              <a:rPr lang="en-US" dirty="0"/>
+              <a:t> </a:t>
+            </a:r>
+          </a:p>
+          <a:p>
+            <a:r>
+              <a:rPr lang="en-US" dirty="0">
+                <a:hlinkClick r:id="rId3"/>
+              </a:rPr>
+              <a:t>https://files.ettus.com/manual/page_sync.html</a:t>
+            </a:r>
+            <a:r>
+              <a:rPr lang="en-US" dirty="0"/>
+              <a:t> </a:t>
+            </a:r>
+          </a:p>
+          <a:p>
+            <a:r>
+              <a:rPr lang="en-US" dirty="0">
+                <a:hlinkClick r:id="rId4"/>
+              </a:rPr>
+              <a:t>https://www.mail-archive.com/usrp-users@lists.ettus.com/msg14581.html</a:t>
             </a:r>
             <a:r>
               <a:rPr lang="en-US" dirty="0"/>
@@ -21098,7 +21157,7 @@
     </p:spTree>
     <p:extLst>
       <p:ext uri="{BB962C8B-B14F-4D97-AF65-F5344CB8AC3E}">
-        <p14:creationId xmlns:p14="http://schemas.microsoft.com/office/powerpoint/2010/main" val="3683405965"/>
+        <p14:creationId xmlns:p14="http://schemas.microsoft.com/office/powerpoint/2010/main" val="696938929"/>
       </p:ext>
     </p:extLst>
   </p:cSld>
@@ -21130,7 +21189,7 @@
           <p:cNvPr id="2" name="Title 1">
             <a:extLst>
               <a:ext uri="{FF2B5EF4-FFF2-40B4-BE49-F238E27FC236}">
-                <a16:creationId xmlns:a16="http://schemas.microsoft.com/office/drawing/2014/main" id="{BB8B6AB5-34C2-F809-D2F6-B8B873B88DC2}"/>
+                <a16:creationId xmlns:a16="http://schemas.microsoft.com/office/drawing/2014/main" id="{E06A6DA9-9A1B-4B6C-9276-E41C443ED478}"/>
               </a:ext>
             </a:extLst>
           </p:cNvPr>
@@ -21148,52 +21207,91 @@
           <a:p>
             <a:r>
               <a:rPr lang="en-US" dirty="0"/>
-              <a:t>Working with USRP </a:t>
+              <a:t>RFNOC library</a:t>
+            </a:r>
+          </a:p>
+        </p:txBody>
+      </p:sp>
+      <p:sp>
+        <p:nvSpPr>
+          <p:cNvPr id="3" name="Content Placeholder 2">
+            <a:extLst>
+              <a:ext uri="{FF2B5EF4-FFF2-40B4-BE49-F238E27FC236}">
+                <a16:creationId xmlns:a16="http://schemas.microsoft.com/office/drawing/2014/main" id="{08B6D7EF-1D02-4C47-B3EC-A280514ADF10}"/>
+              </a:ext>
+            </a:extLst>
+          </p:cNvPr>
+          <p:cNvSpPr>
+            <a:spLocks noGrp="1"/>
+          </p:cNvSpPr>
+          <p:nvPr>
+            <p:ph idx="1"/>
+          </p:nvPr>
+        </p:nvSpPr>
+        <p:spPr/>
+        <p:txBody>
+          <a:bodyPr/>
+          <a:lstStyle/>
+          <a:p>
+            <a:r>
+              <a:rPr lang="en-US" dirty="0"/>
+              <a:t>/</a:t>
             </a:r>
             <a:r>
               <a:rPr lang="en-US" dirty="0" err="1"/>
-              <a:t>c++</a:t>
-            </a:r>
-            <a:r>
-              <a:rPr lang="en-US" dirty="0"/>
-              <a:t> code</a:t>
-            </a:r>
-          </a:p>
-        </p:txBody>
-      </p:sp>
-      <p:sp>
-        <p:nvSpPr>
-          <p:cNvPr id="3" name="Content Placeholder 2">
-            <a:extLst>
-              <a:ext uri="{FF2B5EF4-FFF2-40B4-BE49-F238E27FC236}">
-                <a16:creationId xmlns:a16="http://schemas.microsoft.com/office/drawing/2014/main" id="{97A24664-3E5B-9BA7-8B0B-C064B43B215D}"/>
-              </a:ext>
-            </a:extLst>
-          </p:cNvPr>
-          <p:cNvSpPr>
-            <a:spLocks noGrp="1"/>
-          </p:cNvSpPr>
-          <p:nvPr>
-            <p:ph idx="1"/>
-          </p:nvPr>
-        </p:nvSpPr>
-        <p:spPr/>
-        <p:txBody>
-          <a:bodyPr/>
-          <a:lstStyle/>
-          <a:p>
-            <a:r>
-              <a:rPr lang="en-US" dirty="0">
-                <a:hlinkClick r:id="rId2"/>
-              </a:rPr>
-              <a:t>https://files.ettus.com/manual/classuhd_1_1usrp_1_1multi__usrp.html#a38b10a6bd2128b3810da229c60b31aa1</a:t>
-            </a:r>
-            <a:endParaRPr lang="en-US" dirty="0"/>
-          </a:p>
-          <a:p>
-            <a:r>
-              <a:rPr lang="en-US" dirty="0"/>
-              <a:t>https://files.ettus.com/manual/page_configuration.html</a:t>
+              <a:t>afs</a:t>
+            </a:r>
+            <a:r>
+              <a:rPr lang="en-US" dirty="0"/>
+              <a:t>/eecs.umich.edu/</a:t>
+            </a:r>
+            <a:r>
+              <a:rPr lang="en-US" dirty="0" err="1"/>
+              <a:t>spvlsi</a:t>
+            </a:r>
+            <a:r>
+              <a:rPr lang="en-US" dirty="0"/>
+              <a:t>/users/</a:t>
+            </a:r>
+            <a:r>
+              <a:rPr lang="en-US" dirty="0" err="1"/>
+              <a:t>wangston</a:t>
+            </a:r>
+            <a:r>
+              <a:rPr lang="en-US" dirty="0"/>
+              <a:t>/OSLA/</a:t>
+            </a:r>
+            <a:r>
+              <a:rPr lang="en-US" dirty="0" err="1"/>
+              <a:t>bpsk</a:t>
+            </a:r>
+            <a:r>
+              <a:rPr lang="en-US" dirty="0"/>
+              <a:t>/</a:t>
+            </a:r>
+            <a:r>
+              <a:rPr lang="en-US" dirty="0" err="1"/>
+              <a:t>ww_uhd</a:t>
+            </a:r>
+            <a:r>
+              <a:rPr lang="en-US" dirty="0"/>
+              <a:t>/</a:t>
+            </a:r>
+            <a:r>
+              <a:rPr lang="en-US" dirty="0" err="1"/>
+              <a:t>fpga</a:t>
+            </a:r>
+            <a:r>
+              <a:rPr lang="en-US" dirty="0"/>
+              <a:t>/usrp3/lib/</a:t>
+            </a:r>
+            <a:r>
+              <a:rPr lang="en-US" dirty="0" err="1"/>
+              <a:t>rfnoc</a:t>
+            </a:r>
+            <a:r>
+              <a:rPr lang="en-US" dirty="0"/>
+              <a:t>/moving_sum.v:8</a:t>
             </a:r>
           </a:p>
         </p:txBody>
@@ -21201,7 +21299,7 @@
     </p:spTree>
     <p:extLst>
       <p:ext uri="{BB962C8B-B14F-4D97-AF65-F5344CB8AC3E}">
-        <p14:creationId xmlns:p14="http://schemas.microsoft.com/office/powerpoint/2010/main" val="685194676"/>
+        <p14:creationId xmlns:p14="http://schemas.microsoft.com/office/powerpoint/2010/main" val="2958452029"/>
       </p:ext>
     </p:extLst>
   </p:cSld>
@@ -21233,7 +21331,7 @@
           <p:cNvPr id="2" name="Title 1">
             <a:extLst>
               <a:ext uri="{FF2B5EF4-FFF2-40B4-BE49-F238E27FC236}">
-                <a16:creationId xmlns:a16="http://schemas.microsoft.com/office/drawing/2014/main" id="{ECFEBC56-563E-40DA-85AB-6A8896448CA2}"/>
+                <a16:creationId xmlns:a16="http://schemas.microsoft.com/office/drawing/2014/main" id="{EB30B9E5-3894-4669-BEF0-62F0D30C1633}"/>
               </a:ext>
             </a:extLst>
           </p:cNvPr>
@@ -21251,7 +21349,7 @@
           <a:p>
             <a:r>
               <a:rPr lang="en-US" dirty="0"/>
-              <a:t>Commanding the USRP’s</a:t>
+              <a:t>Useful USRP settings</a:t>
             </a:r>
           </a:p>
         </p:txBody>
@@ -21261,7 +21359,7 @@
           <p:cNvPr id="3" name="Content Placeholder 2">
             <a:extLst>
               <a:ext uri="{FF2B5EF4-FFF2-40B4-BE49-F238E27FC236}">
-                <a16:creationId xmlns:a16="http://schemas.microsoft.com/office/drawing/2014/main" id="{5DEAA8DB-7464-4FB2-BE9D-361F540DC436}"/>
+                <a16:creationId xmlns:a16="http://schemas.microsoft.com/office/drawing/2014/main" id="{65E7B0EF-3635-47A4-B427-2F5E683DE1AB}"/>
               </a:ext>
             </a:extLst>
           </p:cNvPr>
@@ -21281,11 +21379,33 @@
               <a:rPr lang="en-US" dirty="0">
                 <a:hlinkClick r:id="rId2"/>
               </a:rPr>
-              <a:t>https://files.ettus.com/manual/page_usrp_x3x0.html</a:t>
+              <a:t>https://files.ettus.com/manual/classuhd_1_1usrp_1_1multi__usrp.html#a41cc3c774451d0a2c5f69cd8df0f9f06</a:t>
             </a:r>
             <a:r>
               <a:rPr lang="en-US" dirty="0"/>
               <a:t> </a:t>
+            </a:r>
+          </a:p>
+          <a:p>
+            <a:endParaRPr lang="en-US" dirty="0"/>
+          </a:p>
+          <a:p>
+            <a:r>
+              <a:rPr lang="en-US" dirty="0">
+                <a:hlinkClick r:id="rId3"/>
+              </a:rPr>
+              <a:t>https://files.ettus.com/manual/page_dboards.html</a:t>
+            </a:r>
+            <a:r>
+              <a:rPr lang="en-US" dirty="0"/>
+              <a:t> </a:t>
+            </a:r>
+          </a:p>
+          <a:p>
+            <a:pPr lvl="1"/>
+            <a:r>
+              <a:rPr lang="en-US" dirty="0"/>
+              <a:t>Daughterboard setting limits</a:t>
             </a:r>
           </a:p>
         </p:txBody>
@@ -21293,7 +21413,7 @@
     </p:spTree>
     <p:extLst>
       <p:ext uri="{BB962C8B-B14F-4D97-AF65-F5344CB8AC3E}">
-        <p14:creationId xmlns:p14="http://schemas.microsoft.com/office/powerpoint/2010/main" val="4280707945"/>
+        <p14:creationId xmlns:p14="http://schemas.microsoft.com/office/powerpoint/2010/main" val="1174058820"/>
       </p:ext>
     </p:extLst>
   </p:cSld>
@@ -21325,7 +21445,7 @@
           <p:cNvPr id="2" name="Title 1">
             <a:extLst>
               <a:ext uri="{FF2B5EF4-FFF2-40B4-BE49-F238E27FC236}">
-                <a16:creationId xmlns:a16="http://schemas.microsoft.com/office/drawing/2014/main" id="{F969C23B-1247-88EB-CACF-4EA658112384}"/>
+                <a16:creationId xmlns:a16="http://schemas.microsoft.com/office/drawing/2014/main" id="{5691D859-9488-4143-BBA1-B538C9FB9452}"/>
               </a:ext>
             </a:extLst>
           </p:cNvPr>
@@ -21343,7 +21463,7 @@
           <a:p>
             <a:r>
               <a:rPr lang="en-US" dirty="0"/>
-              <a:t>Loopback params</a:t>
+              <a:t>RF tuning and front end settling time</a:t>
             </a:r>
           </a:p>
         </p:txBody>
@@ -21353,7 +21473,7 @@
           <p:cNvPr id="3" name="Content Placeholder 2">
             <a:extLst>
               <a:ext uri="{FF2B5EF4-FFF2-40B4-BE49-F238E27FC236}">
-                <a16:creationId xmlns:a16="http://schemas.microsoft.com/office/drawing/2014/main" id="{127D9C7F-8289-2787-26A9-FA3470CF4BEE}"/>
+                <a16:creationId xmlns:a16="http://schemas.microsoft.com/office/drawing/2014/main" id="{EE98E38B-F9F5-4FCC-BE8F-1FD92DEB536B}"/>
               </a:ext>
             </a:extLst>
           </p:cNvPr>
@@ -21369,83 +21489,23 @@
           <a:bodyPr/>
           <a:lstStyle/>
           <a:p>
-            <a:pPr marL="0" indent="0">
-              <a:buNone/>
-            </a:pPr>
-            <a:r>
-              <a:rPr lang="en-US" dirty="0"/>
-              <a:t>Loopback, 8 inch wire, 30dB attenuator (</a:t>
-            </a:r>
-            <a:r>
-              <a:rPr lang="en-US" dirty="0" err="1"/>
-              <a:t>tx</a:t>
-            </a:r>
-            <a:r>
-              <a:rPr lang="en-US" dirty="0"/>
-              <a:t>/</a:t>
-            </a:r>
-            <a:r>
-              <a:rPr lang="en-US" dirty="0" err="1"/>
-              <a:t>rx</a:t>
-            </a:r>
-            <a:r>
-              <a:rPr lang="en-US" dirty="0"/>
-              <a:t> gain = 0)</a:t>
-            </a:r>
-          </a:p>
-          <a:p>
-            <a:pPr marL="0" indent="0">
-              <a:buNone/>
-            </a:pPr>
-            <a:r>
-              <a:rPr lang="nb-NO" dirty="0"/>
-              <a:t>Setting TX Freq: 2400.000000 MHz..</a:t>
-            </a:r>
-            <a:endParaRPr lang="en-US" dirty="0"/>
-          </a:p>
-          <a:p>
-            <a:pPr marL="0" indent="0">
-              <a:buNone/>
-            </a:pPr>
-            <a:r>
-              <a:rPr lang="de-DE" dirty="0"/>
-              <a:t>D_hat= 119, EsN0= 14.8833, h_hat : abs= 0.439122 arg= 3.12618</a:t>
-            </a:r>
-          </a:p>
-          <a:p>
-            <a:pPr marL="0" indent="0">
-              <a:buNone/>
-            </a:pPr>
-            <a:r>
-              <a:rPr lang="de-DE" dirty="0"/>
-              <a:t>Attenuators dont affect delay</a:t>
-            </a:r>
-          </a:p>
-          <a:p>
-            <a:pPr marL="0" indent="0">
-              <a:buNone/>
-            </a:pPr>
-            <a:r>
-              <a:rPr lang="de-DE" dirty="0"/>
-              <a:t>rx/tx gain dont affect delay</a:t>
-            </a:r>
-          </a:p>
-          <a:p>
-            <a:pPr marL="0" indent="0">
-              <a:buNone/>
-            </a:pPr>
-            <a:r>
-              <a:rPr lang="de-DE" dirty="0"/>
-              <a:t> freq doesnt affect delay</a:t>
-            </a:r>
-            <a:endParaRPr lang="en-US" dirty="0"/>
+            <a:r>
+              <a:rPr lang="en-US" dirty="0">
+                <a:hlinkClick r:id="rId2"/>
+              </a:rPr>
+              <a:t>https://files.ettus.com/manual/page_general.html</a:t>
+            </a:r>
+            <a:r>
+              <a:rPr lang="en-US" dirty="0"/>
+              <a:t> </a:t>
+            </a:r>
           </a:p>
         </p:txBody>
       </p:sp>
     </p:spTree>
     <p:extLst>
       <p:ext uri="{BB962C8B-B14F-4D97-AF65-F5344CB8AC3E}">
-        <p14:creationId xmlns:p14="http://schemas.microsoft.com/office/powerpoint/2010/main" val="2591630338"/>
+        <p14:creationId xmlns:p14="http://schemas.microsoft.com/office/powerpoint/2010/main" val="3683405965"/>
       </p:ext>
     </p:extLst>
   </p:cSld>
@@ -21477,7 +21537,7 @@
           <p:cNvPr id="2" name="Title 1">
             <a:extLst>
               <a:ext uri="{FF2B5EF4-FFF2-40B4-BE49-F238E27FC236}">
-                <a16:creationId xmlns:a16="http://schemas.microsoft.com/office/drawing/2014/main" id="{2D3DB7C2-72CC-4CB8-F6B1-A36EA5A24BF9}"/>
+                <a16:creationId xmlns:a16="http://schemas.microsoft.com/office/drawing/2014/main" id="{BB8B6AB5-34C2-F809-D2F6-B8B873B88DC2}"/>
               </a:ext>
             </a:extLst>
           </p:cNvPr>
@@ -21494,12 +21554,16 @@
           <a:lstStyle/>
           <a:p>
             <a:r>
+              <a:rPr lang="en-US" dirty="0"/>
+              <a:t>Working with USRP </a:t>
+            </a:r>
+            <a:r>
               <a:rPr lang="en-US" dirty="0" err="1"/>
-              <a:t>gpio</a:t>
-            </a:r>
-            <a:r>
-              <a:rPr lang="en-US" dirty="0"/>
-              <a:t> regs</a:t>
+              <a:t>c++</a:t>
+            </a:r>
+            <a:r>
+              <a:rPr lang="en-US" dirty="0"/>
+              <a:t> code</a:t>
             </a:r>
           </a:p>
         </p:txBody>
@@ -21509,7 +21573,7 @@
           <p:cNvPr id="3" name="Content Placeholder 2">
             <a:extLst>
               <a:ext uri="{FF2B5EF4-FFF2-40B4-BE49-F238E27FC236}">
-                <a16:creationId xmlns:a16="http://schemas.microsoft.com/office/drawing/2014/main" id="{A36F57EC-E1A6-A9F8-1035-27D042B8250D}"/>
+                <a16:creationId xmlns:a16="http://schemas.microsoft.com/office/drawing/2014/main" id="{97A24664-3E5B-9BA7-8B0B-C064B43B215D}"/>
               </a:ext>
             </a:extLst>
           </p:cNvPr>
@@ -21529,29 +21593,22 @@
               <a:rPr lang="en-US" dirty="0">
                 <a:hlinkClick r:id="rId2"/>
               </a:rPr>
-              <a:t>https://www.youtube.com/watch?v=ppD06ZETnek</a:t>
+              <a:t>https://files.ettus.com/manual/classuhd_1_1usrp_1_1multi__usrp.html#a38b10a6bd2128b3810da229c60b31aa1</a:t>
             </a:r>
             <a:endParaRPr lang="en-US" dirty="0"/>
           </a:p>
           <a:p>
             <a:r>
-              <a:rPr lang="en-US">
-                <a:hlinkClick r:id="rId3"/>
-              </a:rPr>
-              <a:t>https://events.gnuradio.org/event/18/contributions/234/attachments/74/186/GPIOs%20on%20USRPs.pdf</a:t>
-            </a:r>
-            <a:r>
-              <a:rPr lang="en-US"/>
-              <a:t> </a:t>
-            </a:r>
-            <a:endParaRPr lang="en-US" dirty="0"/>
+              <a:rPr lang="en-US" dirty="0"/>
+              <a:t>https://files.ettus.com/manual/page_configuration.html</a:t>
+            </a:r>
           </a:p>
         </p:txBody>
       </p:sp>
     </p:spTree>
     <p:extLst>
       <p:ext uri="{BB962C8B-B14F-4D97-AF65-F5344CB8AC3E}">
-        <p14:creationId xmlns:p14="http://schemas.microsoft.com/office/powerpoint/2010/main" val="3814779979"/>
+        <p14:creationId xmlns:p14="http://schemas.microsoft.com/office/powerpoint/2010/main" val="685194676"/>
       </p:ext>
     </p:extLst>
   </p:cSld>
@@ -21583,7 +21640,7 @@
           <p:cNvPr id="2" name="Title 1">
             <a:extLst>
               <a:ext uri="{FF2B5EF4-FFF2-40B4-BE49-F238E27FC236}">
-                <a16:creationId xmlns:a16="http://schemas.microsoft.com/office/drawing/2014/main" id="{73927D09-DFF1-1FDC-FB0E-9AC397445E69}"/>
+                <a16:creationId xmlns:a16="http://schemas.microsoft.com/office/drawing/2014/main" id="{ECFEBC56-563E-40DA-85AB-6A8896448CA2}"/>
               </a:ext>
             </a:extLst>
           </p:cNvPr>
@@ -21601,7 +21658,7 @@
           <a:p>
             <a:r>
               <a:rPr lang="en-US" dirty="0"/>
-              <a:t>General useful information</a:t>
+              <a:t>Commanding the USRP’s</a:t>
             </a:r>
           </a:p>
         </p:txBody>
@@ -21611,7 +21668,7 @@
           <p:cNvPr id="3" name="Content Placeholder 2">
             <a:extLst>
               <a:ext uri="{FF2B5EF4-FFF2-40B4-BE49-F238E27FC236}">
-                <a16:creationId xmlns:a16="http://schemas.microsoft.com/office/drawing/2014/main" id="{1E54288F-A9A8-99A3-E9D8-4A490850C70B}"/>
+                <a16:creationId xmlns:a16="http://schemas.microsoft.com/office/drawing/2014/main" id="{5DEAA8DB-7464-4FB2-BE9D-361F540DC436}"/>
               </a:ext>
             </a:extLst>
           </p:cNvPr>
@@ -21631,44 +21688,7 @@
               <a:rPr lang="en-US" dirty="0">
                 <a:hlinkClick r:id="rId2"/>
               </a:rPr>
-              <a:t>https://www.youtube.com/watch?app=desktop&amp;v=PNMOwhEHE6w</a:t>
-            </a:r>
-            <a:r>
-              <a:rPr lang="en-US" dirty="0"/>
-              <a:t> </a:t>
-            </a:r>
-          </a:p>
-          <a:p>
-            <a:r>
-              <a:rPr lang="en-US" dirty="0">
-                <a:hlinkClick r:id="rId3"/>
-              </a:rPr>
-              <a:t>https://www.youtube.com/watch?v=wqKNUXDdIvU&amp;t=1811s</a:t>
-            </a:r>
-            <a:r>
-              <a:rPr lang="en-US" dirty="0"/>
-              <a:t> </a:t>
-            </a:r>
-            <a:br>
-              <a:rPr lang="en-US" dirty="0"/>
-            </a:br>
-            <a:r>
-              <a:rPr lang="en-US" dirty="0">
-                <a:hlinkClick r:id="rId4"/>
-              </a:rPr>
-              <a:t>https://en.wikipedia.org/wiki/Stochastic_resonance</a:t>
-            </a:r>
-            <a:r>
-              <a:rPr lang="en-US" dirty="0"/>
-              <a:t> </a:t>
-            </a:r>
-          </a:p>
-          <a:p>
-            <a:r>
-              <a:rPr lang="en-US" dirty="0">
-                <a:hlinkClick r:id="rId5"/>
-              </a:rPr>
-              <a:t>https://www.youtube.com/watch?v=FxciG7nW-J0</a:t>
+              <a:t>https://files.ettus.com/manual/page_usrp_x3x0.html</a:t>
             </a:r>
             <a:r>
               <a:rPr lang="en-US" dirty="0"/>
@@ -21680,7 +21700,7 @@
     </p:spTree>
     <p:extLst>
       <p:ext uri="{BB962C8B-B14F-4D97-AF65-F5344CB8AC3E}">
-        <p14:creationId xmlns:p14="http://schemas.microsoft.com/office/powerpoint/2010/main" val="4125737294"/>
+        <p14:creationId xmlns:p14="http://schemas.microsoft.com/office/powerpoint/2010/main" val="4280707945"/>
       </p:ext>
     </p:extLst>
   </p:cSld>
@@ -21712,7 +21732,7 @@
           <p:cNvPr id="2" name="Title 1">
             <a:extLst>
               <a:ext uri="{FF2B5EF4-FFF2-40B4-BE49-F238E27FC236}">
-                <a16:creationId xmlns:a16="http://schemas.microsoft.com/office/drawing/2014/main" id="{D440D84B-7064-96C9-54AD-7EE2E9DFDB61}"/>
+                <a16:creationId xmlns:a16="http://schemas.microsoft.com/office/drawing/2014/main" id="{F969C23B-1247-88EB-CACF-4EA658112384}"/>
               </a:ext>
             </a:extLst>
           </p:cNvPr>
@@ -21730,7 +21750,7 @@
           <a:p>
             <a:r>
               <a:rPr lang="en-US" dirty="0"/>
-              <a:t>Nonideality correction</a:t>
+              <a:t>Loopback params</a:t>
             </a:r>
           </a:p>
         </p:txBody>
@@ -21740,7 +21760,7 @@
           <p:cNvPr id="3" name="Content Placeholder 2">
             <a:extLst>
               <a:ext uri="{FF2B5EF4-FFF2-40B4-BE49-F238E27FC236}">
-                <a16:creationId xmlns:a16="http://schemas.microsoft.com/office/drawing/2014/main" id="{32ABC283-D191-0CB8-C67F-64BA7060714F}"/>
+                <a16:creationId xmlns:a16="http://schemas.microsoft.com/office/drawing/2014/main" id="{127D9C7F-8289-2787-26A9-FA3470CF4BEE}"/>
               </a:ext>
             </a:extLst>
           </p:cNvPr>
@@ -21756,61 +21776,83 @@
           <a:bodyPr/>
           <a:lstStyle/>
           <a:p>
+            <a:pPr marL="0" indent="0">
+              <a:buNone/>
+            </a:pPr>
+            <a:r>
+              <a:rPr lang="en-US" dirty="0"/>
+              <a:t>Loopback, 8 inch wire, 30dB attenuator (</a:t>
+            </a:r>
             <a:r>
               <a:rPr lang="en-US" dirty="0" err="1"/>
-              <a:t>fe_control</a:t>
-            </a:r>
-            <a:r>
-              <a:rPr lang="en-US" dirty="0"/>
-              <a:t> sits between x300 and </a:t>
+              <a:t>tx</a:t>
+            </a:r>
+            <a:r>
+              <a:rPr lang="en-US" dirty="0"/>
+              <a:t>/</a:t>
             </a:r>
             <a:r>
               <a:rPr lang="en-US" dirty="0" err="1"/>
-              <a:t>adc</a:t>
-            </a:r>
-            <a:r>
-              <a:rPr lang="en-US" dirty="0"/>
-              <a:t> (CHECK)</a:t>
-            </a:r>
-          </a:p>
-          <a:p>
-            <a:r>
-              <a:rPr lang="en-US" dirty="0">
-                <a:hlinkClick r:id="rId2"/>
-              </a:rPr>
-              <a:t>https://github.com/Wangstonn/ww_uhd/blob/master/fpga/usrp3/lib/control/fe_control.v#L14</a:t>
+              <a:t>rx</a:t>
+            </a:r>
+            <a:r>
+              <a:rPr lang="en-US" dirty="0"/>
+              <a:t> gain = 0)</a:t>
+            </a:r>
+          </a:p>
+          <a:p>
+            <a:pPr marL="0" indent="0">
+              <a:buNone/>
+            </a:pPr>
+            <a:r>
+              <a:rPr lang="nb-NO" dirty="0"/>
+              <a:t>Setting TX Freq: 2400.000000 MHz..</a:t>
             </a:r>
             <a:endParaRPr lang="en-US" dirty="0"/>
           </a:p>
           <a:p>
-            <a:r>
-              <a:rPr lang="en-US" dirty="0"/>
-              <a:t>Performs DC offset correction, </a:t>
-            </a:r>
-            <a:r>
-              <a:rPr lang="en-US" dirty="0" err="1"/>
-              <a:t>etc</a:t>
+            <a:pPr marL="0" indent="0">
+              <a:buNone/>
+            </a:pPr>
+            <a:r>
+              <a:rPr lang="de-DE" dirty="0"/>
+              <a:t>D_hat= 119, EsN0= 14.8833, h_hat : abs= 0.439122 arg= 3.12618</a:t>
+            </a:r>
+          </a:p>
+          <a:p>
+            <a:pPr marL="0" indent="0">
+              <a:buNone/>
+            </a:pPr>
+            <a:r>
+              <a:rPr lang="de-DE" dirty="0"/>
+              <a:t>Attenuators dont affect delay</a:t>
+            </a:r>
+          </a:p>
+          <a:p>
+            <a:pPr marL="0" indent="0">
+              <a:buNone/>
+            </a:pPr>
+            <a:r>
+              <a:rPr lang="de-DE" dirty="0"/>
+              <a:t>rx/tx gain dont affect delay</a:t>
+            </a:r>
+          </a:p>
+          <a:p>
+            <a:pPr marL="0" indent="0">
+              <a:buNone/>
+            </a:pPr>
+            <a:r>
+              <a:rPr lang="de-DE" dirty="0"/>
+              <a:t> freq doesnt affect delay</a:t>
             </a:r>
             <a:endParaRPr lang="en-US" dirty="0"/>
-          </a:p>
-          <a:p>
-            <a:r>
-              <a:rPr lang="en-US" dirty="0">
-                <a:hlinkClick r:id="rId3"/>
-              </a:rPr>
-              <a:t>https://github.com/Wangstonn/ww_uhd/blob/master/fpga/usrp3/lib/rfnoc/blocks/rfnoc_block_radio/tx_frontend_gen3.v#L8</a:t>
-            </a:r>
-            <a:r>
-              <a:rPr lang="en-US" dirty="0"/>
-              <a:t> </a:t>
-            </a:r>
           </a:p>
         </p:txBody>
       </p:sp>
     </p:spTree>
     <p:extLst>
       <p:ext uri="{BB962C8B-B14F-4D97-AF65-F5344CB8AC3E}">
-        <p14:creationId xmlns:p14="http://schemas.microsoft.com/office/powerpoint/2010/main" val="3650599101"/>
+        <p14:creationId xmlns:p14="http://schemas.microsoft.com/office/powerpoint/2010/main" val="2591630338"/>
       </p:ext>
     </p:extLst>
   </p:cSld>
@@ -21842,7 +21884,7 @@
           <p:cNvPr id="2" name="Title 1">
             <a:extLst>
               <a:ext uri="{FF2B5EF4-FFF2-40B4-BE49-F238E27FC236}">
-                <a16:creationId xmlns:a16="http://schemas.microsoft.com/office/drawing/2014/main" id="{8FCA704D-EE47-D3EC-C7F0-B8E06F740B7A}"/>
+                <a16:creationId xmlns:a16="http://schemas.microsoft.com/office/drawing/2014/main" id="{2D3DB7C2-72CC-4CB8-F6B1-A36EA5A24BF9}"/>
               </a:ext>
             </a:extLst>
           </p:cNvPr>
@@ -21859,8 +21901,12 @@
           <a:lstStyle/>
           <a:p>
             <a:r>
-              <a:rPr lang="en-US" dirty="0"/>
-              <a:t>Debug advice</a:t>
+              <a:rPr lang="en-US" dirty="0" err="1"/>
+              <a:t>gpio</a:t>
+            </a:r>
+            <a:r>
+              <a:rPr lang="en-US" dirty="0"/>
+              <a:t> regs</a:t>
             </a:r>
           </a:p>
         </p:txBody>
@@ -21870,7 +21916,7 @@
           <p:cNvPr id="3" name="Content Placeholder 2">
             <a:extLst>
               <a:ext uri="{FF2B5EF4-FFF2-40B4-BE49-F238E27FC236}">
-                <a16:creationId xmlns:a16="http://schemas.microsoft.com/office/drawing/2014/main" id="{D2694319-EF79-8A47-0208-AA5658E030DF}"/>
+                <a16:creationId xmlns:a16="http://schemas.microsoft.com/office/drawing/2014/main" id="{A36F57EC-E1A6-A9F8-1035-27D042B8250D}"/>
               </a:ext>
             </a:extLst>
           </p:cNvPr>
@@ -21887,59 +21933,32 @@
           <a:lstStyle/>
           <a:p>
             <a:r>
-              <a:rPr lang="en-US" dirty="0"/>
-              <a:t>(* </a:t>
-            </a:r>
-            <a:r>
-              <a:rPr lang="en-US" dirty="0" err="1"/>
-              <a:t>dont_touch</a:t>
-            </a:r>
-            <a:r>
-              <a:rPr lang="en-US" dirty="0"/>
-              <a:t> = "true" , </a:t>
-            </a:r>
-            <a:r>
-              <a:rPr lang="en-US" dirty="0" err="1"/>
-              <a:t>mark_debug</a:t>
-            </a:r>
-            <a:r>
-              <a:rPr lang="en-US" dirty="0"/>
-              <a:t> = "true" *) logic </a:t>
-            </a:r>
-            <a:r>
-              <a:rPr lang="en-US" dirty="0" err="1"/>
-              <a:t>fb_o_ctr_r</a:t>
+              <a:rPr lang="en-US" dirty="0">
+                <a:hlinkClick r:id="rId2"/>
+              </a:rPr>
+              <a:t>https://www.youtube.com/watch?v=ppD06ZETnek</a:t>
             </a:r>
             <a:endParaRPr lang="en-US" dirty="0"/>
           </a:p>
           <a:p>
             <a:r>
-              <a:rPr lang="en-US" dirty="0"/>
-              <a:t>(* DONT_TOUCH = "yes" *) </a:t>
-            </a:r>
-            <a:r>
-              <a:rPr lang="en-US" dirty="0" err="1"/>
-              <a:t>dest</a:t>
-            </a:r>
-            <a:r>
-              <a:rPr lang="en-US" dirty="0"/>
+              <a:rPr lang="en-US">
+                <a:hlinkClick r:id="rId3"/>
+              </a:rPr>
+              <a:t>https://events.gnuradio.org/event/18/contributions/234/attachments/74/186/GPIOs%20on%20USRPs.pdf</a:t>
+            </a:r>
+            <a:r>
+              <a:rPr lang="en-US"/>
               <a:t> </a:t>
             </a:r>
-            <a:r>
-              <a:rPr lang="en-US" dirty="0" err="1"/>
-              <a:t>dest_dut</a:t>
-            </a:r>
-            <a:r>
-              <a:rPr lang="en-US" dirty="0"/>
-              <a:t>( )</a:t>
-            </a:r>
+            <a:endParaRPr lang="en-US" dirty="0"/>
           </a:p>
         </p:txBody>
       </p:sp>
     </p:spTree>
     <p:extLst>
       <p:ext uri="{BB962C8B-B14F-4D97-AF65-F5344CB8AC3E}">
-        <p14:creationId xmlns:p14="http://schemas.microsoft.com/office/powerpoint/2010/main" val="726467427"/>
+        <p14:creationId xmlns:p14="http://schemas.microsoft.com/office/powerpoint/2010/main" val="3814779979"/>
       </p:ext>
     </p:extLst>
   </p:cSld>
@@ -21971,7 +21990,7 @@
           <p:cNvPr id="2" name="Title 1">
             <a:extLst>
               <a:ext uri="{FF2B5EF4-FFF2-40B4-BE49-F238E27FC236}">
-                <a16:creationId xmlns:a16="http://schemas.microsoft.com/office/drawing/2014/main" id="{80EAD428-A744-4050-8684-97552BCABC2B}"/>
+                <a16:creationId xmlns:a16="http://schemas.microsoft.com/office/drawing/2014/main" id="{73927D09-DFF1-1FDC-FB0E-9AC397445E69}"/>
               </a:ext>
             </a:extLst>
           </p:cNvPr>
@@ -21989,7 +22008,7 @@
           <a:p>
             <a:r>
               <a:rPr lang="en-US" dirty="0"/>
-              <a:t>Frequency tuning</a:t>
+              <a:t>General useful information</a:t>
             </a:r>
           </a:p>
         </p:txBody>
@@ -21999,7 +22018,7 @@
           <p:cNvPr id="3" name="Content Placeholder 2">
             <a:extLst>
               <a:ext uri="{FF2B5EF4-FFF2-40B4-BE49-F238E27FC236}">
-                <a16:creationId xmlns:a16="http://schemas.microsoft.com/office/drawing/2014/main" id="{FFF4998C-4FF6-440F-9119-0BAF40941B42}"/>
+                <a16:creationId xmlns:a16="http://schemas.microsoft.com/office/drawing/2014/main" id="{1E54288F-A9A8-99A3-E9D8-4A490850C70B}"/>
               </a:ext>
             </a:extLst>
           </p:cNvPr>
@@ -22019,7 +22038,44 @@
               <a:rPr lang="en-US" dirty="0">
                 <a:hlinkClick r:id="rId2"/>
               </a:rPr>
-              <a:t>https://files.ettus.com/manual/page_general.html</a:t>
+              <a:t>https://www.youtube.com/watch?app=desktop&amp;v=PNMOwhEHE6w</a:t>
+            </a:r>
+            <a:r>
+              <a:rPr lang="en-US" dirty="0"/>
+              <a:t> </a:t>
+            </a:r>
+          </a:p>
+          <a:p>
+            <a:r>
+              <a:rPr lang="en-US" dirty="0">
+                <a:hlinkClick r:id="rId3"/>
+              </a:rPr>
+              <a:t>https://www.youtube.com/watch?v=wqKNUXDdIvU&amp;t=1811s</a:t>
+            </a:r>
+            <a:r>
+              <a:rPr lang="en-US" dirty="0"/>
+              <a:t> </a:t>
+            </a:r>
+            <a:br>
+              <a:rPr lang="en-US" dirty="0"/>
+            </a:br>
+            <a:r>
+              <a:rPr lang="en-US" dirty="0">
+                <a:hlinkClick r:id="rId4"/>
+              </a:rPr>
+              <a:t>https://en.wikipedia.org/wiki/Stochastic_resonance</a:t>
+            </a:r>
+            <a:r>
+              <a:rPr lang="en-US" dirty="0"/>
+              <a:t> </a:t>
+            </a:r>
+          </a:p>
+          <a:p>
+            <a:r>
+              <a:rPr lang="en-US" dirty="0">
+                <a:hlinkClick r:id="rId5"/>
+              </a:rPr>
+              <a:t>https://www.youtube.com/watch?v=FxciG7nW-J0</a:t>
             </a:r>
             <a:r>
               <a:rPr lang="en-US" dirty="0"/>
@@ -22031,7 +22087,7 @@
     </p:spTree>
     <p:extLst>
       <p:ext uri="{BB962C8B-B14F-4D97-AF65-F5344CB8AC3E}">
-        <p14:creationId xmlns:p14="http://schemas.microsoft.com/office/powerpoint/2010/main" val="2096715561"/>
+        <p14:creationId xmlns:p14="http://schemas.microsoft.com/office/powerpoint/2010/main" val="4125737294"/>
       </p:ext>
     </p:extLst>
   </p:cSld>
@@ -22189,6 +22245,357 @@
     <p:extLst>
       <p:ext uri="{BB962C8B-B14F-4D97-AF65-F5344CB8AC3E}">
         <p14:creationId xmlns:p14="http://schemas.microsoft.com/office/powerpoint/2010/main" val="3459663894"/>
+      </p:ext>
+    </p:extLst>
+  </p:cSld>
+  <p:clrMapOvr>
+    <a:masterClrMapping/>
+  </p:clrMapOvr>
+</p:sld>
+</file>
+
+<file path=ppt/slides/slide80.xml><?xml version="1.0" encoding="utf-8"?>
+<p:sld xmlns:a="http://schemas.openxmlformats.org/drawingml/2006/main" xmlns:r="http://schemas.openxmlformats.org/officeDocument/2006/relationships" xmlns:p="http://schemas.openxmlformats.org/presentationml/2006/main">
+  <p:cSld>
+    <p:spTree>
+      <p:nvGrpSpPr>
+        <p:cNvPr id="1" name=""/>
+        <p:cNvGrpSpPr/>
+        <p:nvPr/>
+      </p:nvGrpSpPr>
+      <p:grpSpPr>
+        <a:xfrm>
+          <a:off x="0" y="0"/>
+          <a:ext cx="0" cy="0"/>
+          <a:chOff x="0" y="0"/>
+          <a:chExt cx="0" cy="0"/>
+        </a:xfrm>
+      </p:grpSpPr>
+      <p:sp>
+        <p:nvSpPr>
+          <p:cNvPr id="2" name="Title 1">
+            <a:extLst>
+              <a:ext uri="{FF2B5EF4-FFF2-40B4-BE49-F238E27FC236}">
+                <a16:creationId xmlns:a16="http://schemas.microsoft.com/office/drawing/2014/main" id="{D440D84B-7064-96C9-54AD-7EE2E9DFDB61}"/>
+              </a:ext>
+            </a:extLst>
+          </p:cNvPr>
+          <p:cNvSpPr>
+            <a:spLocks noGrp="1"/>
+          </p:cNvSpPr>
+          <p:nvPr>
+            <p:ph type="title"/>
+          </p:nvPr>
+        </p:nvSpPr>
+        <p:spPr/>
+        <p:txBody>
+          <a:bodyPr/>
+          <a:lstStyle/>
+          <a:p>
+            <a:r>
+              <a:rPr lang="en-US" dirty="0"/>
+              <a:t>Nonideality correction</a:t>
+            </a:r>
+          </a:p>
+        </p:txBody>
+      </p:sp>
+      <p:sp>
+        <p:nvSpPr>
+          <p:cNvPr id="3" name="Content Placeholder 2">
+            <a:extLst>
+              <a:ext uri="{FF2B5EF4-FFF2-40B4-BE49-F238E27FC236}">
+                <a16:creationId xmlns:a16="http://schemas.microsoft.com/office/drawing/2014/main" id="{32ABC283-D191-0CB8-C67F-64BA7060714F}"/>
+              </a:ext>
+            </a:extLst>
+          </p:cNvPr>
+          <p:cNvSpPr>
+            <a:spLocks noGrp="1"/>
+          </p:cNvSpPr>
+          <p:nvPr>
+            <p:ph idx="1"/>
+          </p:nvPr>
+        </p:nvSpPr>
+        <p:spPr/>
+        <p:txBody>
+          <a:bodyPr/>
+          <a:lstStyle/>
+          <a:p>
+            <a:r>
+              <a:rPr lang="en-US" dirty="0" err="1"/>
+              <a:t>fe_control</a:t>
+            </a:r>
+            <a:r>
+              <a:rPr lang="en-US" dirty="0"/>
+              <a:t> sits between x300 and </a:t>
+            </a:r>
+            <a:r>
+              <a:rPr lang="en-US" dirty="0" err="1"/>
+              <a:t>adc</a:t>
+            </a:r>
+            <a:r>
+              <a:rPr lang="en-US" dirty="0"/>
+              <a:t> (CHECK)</a:t>
+            </a:r>
+          </a:p>
+          <a:p>
+            <a:r>
+              <a:rPr lang="en-US" dirty="0">
+                <a:hlinkClick r:id="rId2"/>
+              </a:rPr>
+              <a:t>https://github.com/Wangstonn/ww_uhd/blob/master/fpga/usrp3/lib/control/fe_control.v#L14</a:t>
+            </a:r>
+            <a:endParaRPr lang="en-US" dirty="0"/>
+          </a:p>
+          <a:p>
+            <a:r>
+              <a:rPr lang="en-US" dirty="0"/>
+              <a:t>Performs DC offset correction, </a:t>
+            </a:r>
+            <a:r>
+              <a:rPr lang="en-US" dirty="0" err="1"/>
+              <a:t>etc</a:t>
+            </a:r>
+            <a:endParaRPr lang="en-US" dirty="0"/>
+          </a:p>
+          <a:p>
+            <a:r>
+              <a:rPr lang="en-US" dirty="0">
+                <a:hlinkClick r:id="rId3"/>
+              </a:rPr>
+              <a:t>https://github.com/Wangstonn/ww_uhd/blob/master/fpga/usrp3/lib/rfnoc/blocks/rfnoc_block_radio/tx_frontend_gen3.v#L8</a:t>
+            </a:r>
+            <a:r>
+              <a:rPr lang="en-US" dirty="0"/>
+              <a:t> </a:t>
+            </a:r>
+          </a:p>
+        </p:txBody>
+      </p:sp>
+    </p:spTree>
+    <p:extLst>
+      <p:ext uri="{BB962C8B-B14F-4D97-AF65-F5344CB8AC3E}">
+        <p14:creationId xmlns:p14="http://schemas.microsoft.com/office/powerpoint/2010/main" val="3650599101"/>
+      </p:ext>
+    </p:extLst>
+  </p:cSld>
+  <p:clrMapOvr>
+    <a:masterClrMapping/>
+  </p:clrMapOvr>
+</p:sld>
+</file>
+
+<file path=ppt/slides/slide81.xml><?xml version="1.0" encoding="utf-8"?>
+<p:sld xmlns:a="http://schemas.openxmlformats.org/drawingml/2006/main" xmlns:r="http://schemas.openxmlformats.org/officeDocument/2006/relationships" xmlns:p="http://schemas.openxmlformats.org/presentationml/2006/main">
+  <p:cSld>
+    <p:spTree>
+      <p:nvGrpSpPr>
+        <p:cNvPr id="1" name=""/>
+        <p:cNvGrpSpPr/>
+        <p:nvPr/>
+      </p:nvGrpSpPr>
+      <p:grpSpPr>
+        <a:xfrm>
+          <a:off x="0" y="0"/>
+          <a:ext cx="0" cy="0"/>
+          <a:chOff x="0" y="0"/>
+          <a:chExt cx="0" cy="0"/>
+        </a:xfrm>
+      </p:grpSpPr>
+      <p:sp>
+        <p:nvSpPr>
+          <p:cNvPr id="2" name="Title 1">
+            <a:extLst>
+              <a:ext uri="{FF2B5EF4-FFF2-40B4-BE49-F238E27FC236}">
+                <a16:creationId xmlns:a16="http://schemas.microsoft.com/office/drawing/2014/main" id="{8FCA704D-EE47-D3EC-C7F0-B8E06F740B7A}"/>
+              </a:ext>
+            </a:extLst>
+          </p:cNvPr>
+          <p:cNvSpPr>
+            <a:spLocks noGrp="1"/>
+          </p:cNvSpPr>
+          <p:nvPr>
+            <p:ph type="title"/>
+          </p:nvPr>
+        </p:nvSpPr>
+        <p:spPr/>
+        <p:txBody>
+          <a:bodyPr/>
+          <a:lstStyle/>
+          <a:p>
+            <a:r>
+              <a:rPr lang="en-US" dirty="0"/>
+              <a:t>Debug advice</a:t>
+            </a:r>
+          </a:p>
+        </p:txBody>
+      </p:sp>
+      <p:sp>
+        <p:nvSpPr>
+          <p:cNvPr id="3" name="Content Placeholder 2">
+            <a:extLst>
+              <a:ext uri="{FF2B5EF4-FFF2-40B4-BE49-F238E27FC236}">
+                <a16:creationId xmlns:a16="http://schemas.microsoft.com/office/drawing/2014/main" id="{D2694319-EF79-8A47-0208-AA5658E030DF}"/>
+              </a:ext>
+            </a:extLst>
+          </p:cNvPr>
+          <p:cNvSpPr>
+            <a:spLocks noGrp="1"/>
+          </p:cNvSpPr>
+          <p:nvPr>
+            <p:ph idx="1"/>
+          </p:nvPr>
+        </p:nvSpPr>
+        <p:spPr/>
+        <p:txBody>
+          <a:bodyPr/>
+          <a:lstStyle/>
+          <a:p>
+            <a:r>
+              <a:rPr lang="en-US" dirty="0"/>
+              <a:t>(* </a:t>
+            </a:r>
+            <a:r>
+              <a:rPr lang="en-US" dirty="0" err="1"/>
+              <a:t>dont_touch</a:t>
+            </a:r>
+            <a:r>
+              <a:rPr lang="en-US" dirty="0"/>
+              <a:t> = "true" , </a:t>
+            </a:r>
+            <a:r>
+              <a:rPr lang="en-US" dirty="0" err="1"/>
+              <a:t>mark_debug</a:t>
+            </a:r>
+            <a:r>
+              <a:rPr lang="en-US" dirty="0"/>
+              <a:t> = "true" *) logic </a:t>
+            </a:r>
+            <a:r>
+              <a:rPr lang="en-US" dirty="0" err="1"/>
+              <a:t>fb_o_ctr_r</a:t>
+            </a:r>
+            <a:endParaRPr lang="en-US" dirty="0"/>
+          </a:p>
+          <a:p>
+            <a:r>
+              <a:rPr lang="en-US" dirty="0"/>
+              <a:t>(* DONT_TOUCH = "yes" *) </a:t>
+            </a:r>
+            <a:r>
+              <a:rPr lang="en-US" dirty="0" err="1"/>
+              <a:t>dest</a:t>
+            </a:r>
+            <a:r>
+              <a:rPr lang="en-US" dirty="0"/>
+              <a:t> </a:t>
+            </a:r>
+            <a:r>
+              <a:rPr lang="en-US" dirty="0" err="1"/>
+              <a:t>dest_dut</a:t>
+            </a:r>
+            <a:r>
+              <a:rPr lang="en-US" dirty="0"/>
+              <a:t>( )</a:t>
+            </a:r>
+          </a:p>
+        </p:txBody>
+      </p:sp>
+    </p:spTree>
+    <p:extLst>
+      <p:ext uri="{BB962C8B-B14F-4D97-AF65-F5344CB8AC3E}">
+        <p14:creationId xmlns:p14="http://schemas.microsoft.com/office/powerpoint/2010/main" val="726467427"/>
+      </p:ext>
+    </p:extLst>
+  </p:cSld>
+  <p:clrMapOvr>
+    <a:masterClrMapping/>
+  </p:clrMapOvr>
+</p:sld>
+</file>
+
+<file path=ppt/slides/slide82.xml><?xml version="1.0" encoding="utf-8"?>
+<p:sld xmlns:a="http://schemas.openxmlformats.org/drawingml/2006/main" xmlns:r="http://schemas.openxmlformats.org/officeDocument/2006/relationships" xmlns:p="http://schemas.openxmlformats.org/presentationml/2006/main">
+  <p:cSld>
+    <p:spTree>
+      <p:nvGrpSpPr>
+        <p:cNvPr id="1" name=""/>
+        <p:cNvGrpSpPr/>
+        <p:nvPr/>
+      </p:nvGrpSpPr>
+      <p:grpSpPr>
+        <a:xfrm>
+          <a:off x="0" y="0"/>
+          <a:ext cx="0" cy="0"/>
+          <a:chOff x="0" y="0"/>
+          <a:chExt cx="0" cy="0"/>
+        </a:xfrm>
+      </p:grpSpPr>
+      <p:sp>
+        <p:nvSpPr>
+          <p:cNvPr id="2" name="Title 1">
+            <a:extLst>
+              <a:ext uri="{FF2B5EF4-FFF2-40B4-BE49-F238E27FC236}">
+                <a16:creationId xmlns:a16="http://schemas.microsoft.com/office/drawing/2014/main" id="{80EAD428-A744-4050-8684-97552BCABC2B}"/>
+              </a:ext>
+            </a:extLst>
+          </p:cNvPr>
+          <p:cNvSpPr>
+            <a:spLocks noGrp="1"/>
+          </p:cNvSpPr>
+          <p:nvPr>
+            <p:ph type="title"/>
+          </p:nvPr>
+        </p:nvSpPr>
+        <p:spPr/>
+        <p:txBody>
+          <a:bodyPr/>
+          <a:lstStyle/>
+          <a:p>
+            <a:r>
+              <a:rPr lang="en-US" dirty="0"/>
+              <a:t>Frequency tuning</a:t>
+            </a:r>
+          </a:p>
+        </p:txBody>
+      </p:sp>
+      <p:sp>
+        <p:nvSpPr>
+          <p:cNvPr id="3" name="Content Placeholder 2">
+            <a:extLst>
+              <a:ext uri="{FF2B5EF4-FFF2-40B4-BE49-F238E27FC236}">
+                <a16:creationId xmlns:a16="http://schemas.microsoft.com/office/drawing/2014/main" id="{FFF4998C-4FF6-440F-9119-0BAF40941B42}"/>
+              </a:ext>
+            </a:extLst>
+          </p:cNvPr>
+          <p:cNvSpPr>
+            <a:spLocks noGrp="1"/>
+          </p:cNvSpPr>
+          <p:nvPr>
+            <p:ph idx="1"/>
+          </p:nvPr>
+        </p:nvSpPr>
+        <p:spPr/>
+        <p:txBody>
+          <a:bodyPr/>
+          <a:lstStyle/>
+          <a:p>
+            <a:r>
+              <a:rPr lang="en-US" dirty="0">
+                <a:hlinkClick r:id="rId2"/>
+              </a:rPr>
+              <a:t>https://files.ettus.com/manual/page_general.html</a:t>
+            </a:r>
+            <a:r>
+              <a:rPr lang="en-US" dirty="0"/>
+              <a:t> </a:t>
+            </a:r>
+          </a:p>
+        </p:txBody>
+      </p:sp>
+    </p:spTree>
+    <p:extLst>
+      <p:ext uri="{BB962C8B-B14F-4D97-AF65-F5344CB8AC3E}">
+        <p14:creationId xmlns:p14="http://schemas.microsoft.com/office/powerpoint/2010/main" val="2096715561"/>
       </p:ext>
     </p:extLst>
   </p:cSld>
